--- a/平安 (同心圓).pptx
+++ b/平安 (同心圓).pptx
@@ -5,10 +5,15 @@
     <p:sldMasterId id="2147483660" r:id="rId1"/>
   </p:sldMasterIdLst>
   <p:sldIdLst>
-    <p:sldId id="257" r:id="rId2"/>
-    <p:sldId id="258" r:id="rId3"/>
-    <p:sldId id="259" r:id="rId4"/>
-    <p:sldId id="260" r:id="rId5"/>
+    <p:sldId id="391" r:id="rId2"/>
+    <p:sldId id="392" r:id="rId3"/>
+    <p:sldId id="393" r:id="rId4"/>
+    <p:sldId id="394" r:id="rId5"/>
+    <p:sldId id="395" r:id="rId6"/>
+    <p:sldId id="396" r:id="rId7"/>
+    <p:sldId id="397" r:id="rId8"/>
+    <p:sldId id="398" r:id="rId9"/>
+    <p:sldId id="399" r:id="rId10"/>
   </p:sldIdLst>
   <p:sldSz cx="9144000" cy="5143500" type="screen16x9"/>
   <p:notesSz cx="6858000" cy="9144000"/>
@@ -107,6 +112,22 @@
       </a:defRPr>
     </a:lvl9pPr>
   </p:defaultTextStyle>
+  <p:extLst>
+    <p:ext uri="{EFAFB233-063F-42B5-8137-9DF3F51BA10A}">
+      <p15:sldGuideLst xmlns:p15="http://schemas.microsoft.com/office/powerpoint/2012/main">
+        <p15:guide id="1" orient="horz" pos="1620">
+          <p15:clr>
+            <a:srgbClr val="A4A3A4"/>
+          </p15:clr>
+        </p15:guide>
+        <p15:guide id="2" pos="2880">
+          <p15:clr>
+            <a:srgbClr val="A4A3A4"/>
+          </p15:clr>
+        </p15:guide>
+      </p15:sldGuideLst>
+    </p:ext>
+  </p:extLst>
 </p:presentation>
 </file>
 
@@ -148,10 +169,9 @@
           <a:lstStyle/>
           <a:p>
             <a:r>
-              <a:rPr lang="zh-TW" altLang="en-US" smtClean="0"/>
+              <a:rPr lang="zh-TW" altLang="en-US"/>
               <a:t>按一下以編輯母片標題樣式</a:t>
             </a:r>
-            <a:endParaRPr lang="zh-TW" altLang="en-US"/>
           </a:p>
         </p:txBody>
       </p:sp>
@@ -267,10 +287,9 @@
           </a:lstStyle>
           <a:p>
             <a:r>
-              <a:rPr lang="zh-TW" altLang="en-US" smtClean="0"/>
+              <a:rPr lang="zh-TW" altLang="en-US"/>
               <a:t>按一下以編輯母片副標題樣式</a:t>
             </a:r>
-            <a:endParaRPr lang="zh-TW" altLang="en-US"/>
           </a:p>
         </p:txBody>
       </p:sp>
@@ -291,7 +310,7 @@
           <a:p>
             <a:fld id="{DDAFCC2C-F392-4357-BF97-16B7A3B9A502}" type="datetimeFigureOut">
               <a:rPr lang="zh-TW" altLang="en-US" smtClean="0"/>
-              <a:t>2020/8/27</a:t>
+              <a:t>2025/7/19</a:t>
             </a:fld>
             <a:endParaRPr lang="zh-TW" altLang="en-US"/>
           </a:p>
@@ -380,10 +399,9 @@
           <a:lstStyle/>
           <a:p>
             <a:r>
-              <a:rPr lang="zh-TW" altLang="en-US" smtClean="0"/>
+              <a:rPr lang="zh-TW" altLang="en-US"/>
               <a:t>按一下以編輯母片標題樣式</a:t>
             </a:r>
-            <a:endParaRPr lang="zh-TW" altLang="en-US"/>
           </a:p>
         </p:txBody>
       </p:sp>
@@ -404,38 +422,37 @@
           <a:p>
             <a:pPr lvl="0"/>
             <a:r>
-              <a:rPr lang="zh-TW" altLang="en-US" smtClean="0"/>
+              <a:rPr lang="zh-TW" altLang="en-US"/>
               <a:t>按一下以編輯母片文字樣式</a:t>
             </a:r>
           </a:p>
           <a:p>
             <a:pPr lvl="1"/>
             <a:r>
-              <a:rPr lang="zh-TW" altLang="en-US" smtClean="0"/>
+              <a:rPr lang="zh-TW" altLang="en-US"/>
               <a:t>第二層</a:t>
             </a:r>
           </a:p>
           <a:p>
             <a:pPr lvl="2"/>
             <a:r>
-              <a:rPr lang="zh-TW" altLang="en-US" smtClean="0"/>
+              <a:rPr lang="zh-TW" altLang="en-US"/>
               <a:t>第三層</a:t>
             </a:r>
           </a:p>
           <a:p>
             <a:pPr lvl="3"/>
             <a:r>
-              <a:rPr lang="zh-TW" altLang="en-US" smtClean="0"/>
+              <a:rPr lang="zh-TW" altLang="en-US"/>
               <a:t>第四層</a:t>
             </a:r>
           </a:p>
           <a:p>
             <a:pPr lvl="4"/>
             <a:r>
-              <a:rPr lang="zh-TW" altLang="en-US" smtClean="0"/>
+              <a:rPr lang="zh-TW" altLang="en-US"/>
               <a:t>第五層</a:t>
             </a:r>
-            <a:endParaRPr lang="zh-TW" altLang="en-US"/>
           </a:p>
         </p:txBody>
       </p:sp>
@@ -456,7 +473,7 @@
           <a:p>
             <a:fld id="{DDAFCC2C-F392-4357-BF97-16B7A3B9A502}" type="datetimeFigureOut">
               <a:rPr lang="zh-TW" altLang="en-US" smtClean="0"/>
-              <a:t>2020/8/27</a:t>
+              <a:t>2025/7/19</a:t>
             </a:fld>
             <a:endParaRPr lang="zh-TW" altLang="en-US"/>
           </a:p>
@@ -550,10 +567,9 @@
           <a:lstStyle/>
           <a:p>
             <a:r>
-              <a:rPr lang="zh-TW" altLang="en-US" smtClean="0"/>
+              <a:rPr lang="zh-TW" altLang="en-US"/>
               <a:t>按一下以編輯母片標題樣式</a:t>
             </a:r>
-            <a:endParaRPr lang="zh-TW" altLang="en-US"/>
           </a:p>
         </p:txBody>
       </p:sp>
@@ -579,38 +595,37 @@
           <a:p>
             <a:pPr lvl="0"/>
             <a:r>
-              <a:rPr lang="zh-TW" altLang="en-US" smtClean="0"/>
+              <a:rPr lang="zh-TW" altLang="en-US"/>
               <a:t>按一下以編輯母片文字樣式</a:t>
             </a:r>
           </a:p>
           <a:p>
             <a:pPr lvl="1"/>
             <a:r>
-              <a:rPr lang="zh-TW" altLang="en-US" smtClean="0"/>
+              <a:rPr lang="zh-TW" altLang="en-US"/>
               <a:t>第二層</a:t>
             </a:r>
           </a:p>
           <a:p>
             <a:pPr lvl="2"/>
             <a:r>
-              <a:rPr lang="zh-TW" altLang="en-US" smtClean="0"/>
+              <a:rPr lang="zh-TW" altLang="en-US"/>
               <a:t>第三層</a:t>
             </a:r>
           </a:p>
           <a:p>
             <a:pPr lvl="3"/>
             <a:r>
-              <a:rPr lang="zh-TW" altLang="en-US" smtClean="0"/>
+              <a:rPr lang="zh-TW" altLang="en-US"/>
               <a:t>第四層</a:t>
             </a:r>
           </a:p>
           <a:p>
             <a:pPr lvl="4"/>
             <a:r>
-              <a:rPr lang="zh-TW" altLang="en-US" smtClean="0"/>
+              <a:rPr lang="zh-TW" altLang="en-US"/>
               <a:t>第五層</a:t>
             </a:r>
-            <a:endParaRPr lang="zh-TW" altLang="en-US"/>
           </a:p>
         </p:txBody>
       </p:sp>
@@ -631,7 +646,7 @@
           <a:p>
             <a:fld id="{DDAFCC2C-F392-4357-BF97-16B7A3B9A502}" type="datetimeFigureOut">
               <a:rPr lang="zh-TW" altLang="en-US" smtClean="0"/>
-              <a:t>2020/8/27</a:t>
+              <a:t>2025/7/19</a:t>
             </a:fld>
             <a:endParaRPr lang="zh-TW" altLang="en-US"/>
           </a:p>
@@ -720,10 +735,9 @@
           <a:lstStyle/>
           <a:p>
             <a:r>
-              <a:rPr lang="zh-TW" altLang="en-US" smtClean="0"/>
+              <a:rPr lang="zh-TW" altLang="en-US"/>
               <a:t>按一下以編輯母片標題樣式</a:t>
             </a:r>
-            <a:endParaRPr lang="zh-TW" altLang="en-US"/>
           </a:p>
         </p:txBody>
       </p:sp>
@@ -744,38 +758,37 @@
           <a:p>
             <a:pPr lvl="0"/>
             <a:r>
-              <a:rPr lang="zh-TW" altLang="en-US" smtClean="0"/>
+              <a:rPr lang="zh-TW" altLang="en-US"/>
               <a:t>按一下以編輯母片文字樣式</a:t>
             </a:r>
           </a:p>
           <a:p>
             <a:pPr lvl="1"/>
             <a:r>
-              <a:rPr lang="zh-TW" altLang="en-US" smtClean="0"/>
+              <a:rPr lang="zh-TW" altLang="en-US"/>
               <a:t>第二層</a:t>
             </a:r>
           </a:p>
           <a:p>
             <a:pPr lvl="2"/>
             <a:r>
-              <a:rPr lang="zh-TW" altLang="en-US" smtClean="0"/>
+              <a:rPr lang="zh-TW" altLang="en-US"/>
               <a:t>第三層</a:t>
             </a:r>
           </a:p>
           <a:p>
             <a:pPr lvl="3"/>
             <a:r>
-              <a:rPr lang="zh-TW" altLang="en-US" smtClean="0"/>
+              <a:rPr lang="zh-TW" altLang="en-US"/>
               <a:t>第四層</a:t>
             </a:r>
           </a:p>
           <a:p>
             <a:pPr lvl="4"/>
             <a:r>
-              <a:rPr lang="zh-TW" altLang="en-US" smtClean="0"/>
+              <a:rPr lang="zh-TW" altLang="en-US"/>
               <a:t>第五層</a:t>
             </a:r>
-            <a:endParaRPr lang="zh-TW" altLang="en-US"/>
           </a:p>
         </p:txBody>
       </p:sp>
@@ -796,7 +809,7 @@
           <a:p>
             <a:fld id="{DDAFCC2C-F392-4357-BF97-16B7A3B9A502}" type="datetimeFigureOut">
               <a:rPr lang="zh-TW" altLang="en-US" smtClean="0"/>
-              <a:t>2020/8/27</a:t>
+              <a:t>2025/7/19</a:t>
             </a:fld>
             <a:endParaRPr lang="zh-TW" altLang="en-US"/>
           </a:p>
@@ -894,10 +907,9 @@
           </a:lstStyle>
           <a:p>
             <a:r>
-              <a:rPr lang="zh-TW" altLang="en-US" smtClean="0"/>
+              <a:rPr lang="zh-TW" altLang="en-US"/>
               <a:t>按一下以編輯母片標題樣式</a:t>
             </a:r>
-            <a:endParaRPr lang="zh-TW" altLang="en-US"/>
           </a:p>
         </p:txBody>
       </p:sp>
@@ -1014,7 +1026,7 @@
           <a:p>
             <a:pPr lvl="0"/>
             <a:r>
-              <a:rPr lang="zh-TW" altLang="en-US" smtClean="0"/>
+              <a:rPr lang="zh-TW" altLang="en-US"/>
               <a:t>按一下以編輯母片文字樣式</a:t>
             </a:r>
           </a:p>
@@ -1037,7 +1049,7 @@
           <a:p>
             <a:fld id="{DDAFCC2C-F392-4357-BF97-16B7A3B9A502}" type="datetimeFigureOut">
               <a:rPr lang="zh-TW" altLang="en-US" smtClean="0"/>
-              <a:t>2020/8/27</a:t>
+              <a:t>2025/7/19</a:t>
             </a:fld>
             <a:endParaRPr lang="zh-TW" altLang="en-US"/>
           </a:p>
@@ -1126,10 +1138,9 @@
           <a:lstStyle/>
           <a:p>
             <a:r>
-              <a:rPr lang="zh-TW" altLang="en-US" smtClean="0"/>
+              <a:rPr lang="zh-TW" altLang="en-US"/>
               <a:t>按一下以編輯母片標題樣式</a:t>
             </a:r>
-            <a:endParaRPr lang="zh-TW" altLang="en-US"/>
           </a:p>
         </p:txBody>
       </p:sp>
@@ -1183,38 +1194,37 @@
           <a:p>
             <a:pPr lvl="0"/>
             <a:r>
-              <a:rPr lang="zh-TW" altLang="en-US" smtClean="0"/>
+              <a:rPr lang="zh-TW" altLang="en-US"/>
               <a:t>按一下以編輯母片文字樣式</a:t>
             </a:r>
           </a:p>
           <a:p>
             <a:pPr lvl="1"/>
             <a:r>
-              <a:rPr lang="zh-TW" altLang="en-US" smtClean="0"/>
+              <a:rPr lang="zh-TW" altLang="en-US"/>
               <a:t>第二層</a:t>
             </a:r>
           </a:p>
           <a:p>
             <a:pPr lvl="2"/>
             <a:r>
-              <a:rPr lang="zh-TW" altLang="en-US" smtClean="0"/>
+              <a:rPr lang="zh-TW" altLang="en-US"/>
               <a:t>第三層</a:t>
             </a:r>
           </a:p>
           <a:p>
             <a:pPr lvl="3"/>
             <a:r>
-              <a:rPr lang="zh-TW" altLang="en-US" smtClean="0"/>
+              <a:rPr lang="zh-TW" altLang="en-US"/>
               <a:t>第四層</a:t>
             </a:r>
           </a:p>
           <a:p>
             <a:pPr lvl="4"/>
             <a:r>
-              <a:rPr lang="zh-TW" altLang="en-US" smtClean="0"/>
+              <a:rPr lang="zh-TW" altLang="en-US"/>
               <a:t>第五層</a:t>
             </a:r>
-            <a:endParaRPr lang="zh-TW" altLang="en-US"/>
           </a:p>
         </p:txBody>
       </p:sp>
@@ -1268,38 +1278,37 @@
           <a:p>
             <a:pPr lvl="0"/>
             <a:r>
-              <a:rPr lang="zh-TW" altLang="en-US" smtClean="0"/>
+              <a:rPr lang="zh-TW" altLang="en-US"/>
               <a:t>按一下以編輯母片文字樣式</a:t>
             </a:r>
           </a:p>
           <a:p>
             <a:pPr lvl="1"/>
             <a:r>
-              <a:rPr lang="zh-TW" altLang="en-US" smtClean="0"/>
+              <a:rPr lang="zh-TW" altLang="en-US"/>
               <a:t>第二層</a:t>
             </a:r>
           </a:p>
           <a:p>
             <a:pPr lvl="2"/>
             <a:r>
-              <a:rPr lang="zh-TW" altLang="en-US" smtClean="0"/>
+              <a:rPr lang="zh-TW" altLang="en-US"/>
               <a:t>第三層</a:t>
             </a:r>
           </a:p>
           <a:p>
             <a:pPr lvl="3"/>
             <a:r>
-              <a:rPr lang="zh-TW" altLang="en-US" smtClean="0"/>
+              <a:rPr lang="zh-TW" altLang="en-US"/>
               <a:t>第四層</a:t>
             </a:r>
           </a:p>
           <a:p>
             <a:pPr lvl="4"/>
             <a:r>
-              <a:rPr lang="zh-TW" altLang="en-US" smtClean="0"/>
+              <a:rPr lang="zh-TW" altLang="en-US"/>
               <a:t>第五層</a:t>
             </a:r>
-            <a:endParaRPr lang="zh-TW" altLang="en-US"/>
           </a:p>
         </p:txBody>
       </p:sp>
@@ -1320,7 +1329,7 @@
           <a:p>
             <a:fld id="{DDAFCC2C-F392-4357-BF97-16B7A3B9A502}" type="datetimeFigureOut">
               <a:rPr lang="zh-TW" altLang="en-US" smtClean="0"/>
-              <a:t>2020/8/27</a:t>
+              <a:t>2025/7/19</a:t>
             </a:fld>
             <a:endParaRPr lang="zh-TW" altLang="en-US"/>
           </a:p>
@@ -1413,10 +1422,9 @@
           </a:lstStyle>
           <a:p>
             <a:r>
-              <a:rPr lang="zh-TW" altLang="en-US" smtClean="0"/>
+              <a:rPr lang="zh-TW" altLang="en-US"/>
               <a:t>按一下以編輯母片標題樣式</a:t>
             </a:r>
-            <a:endParaRPr lang="zh-TW" altLang="en-US"/>
           </a:p>
         </p:txBody>
       </p:sp>
@@ -1479,7 +1487,7 @@
           <a:p>
             <a:pPr lvl="0"/>
             <a:r>
-              <a:rPr lang="zh-TW" altLang="en-US" smtClean="0"/>
+              <a:rPr lang="zh-TW" altLang="en-US"/>
               <a:t>按一下以編輯母片文字樣式</a:t>
             </a:r>
           </a:p>
@@ -1535,38 +1543,37 @@
           <a:p>
             <a:pPr lvl="0"/>
             <a:r>
-              <a:rPr lang="zh-TW" altLang="en-US" smtClean="0"/>
+              <a:rPr lang="zh-TW" altLang="en-US"/>
               <a:t>按一下以編輯母片文字樣式</a:t>
             </a:r>
           </a:p>
           <a:p>
             <a:pPr lvl="1"/>
             <a:r>
-              <a:rPr lang="zh-TW" altLang="en-US" smtClean="0"/>
+              <a:rPr lang="zh-TW" altLang="en-US"/>
               <a:t>第二層</a:t>
             </a:r>
           </a:p>
           <a:p>
             <a:pPr lvl="2"/>
             <a:r>
-              <a:rPr lang="zh-TW" altLang="en-US" smtClean="0"/>
+              <a:rPr lang="zh-TW" altLang="en-US"/>
               <a:t>第三層</a:t>
             </a:r>
           </a:p>
           <a:p>
             <a:pPr lvl="3"/>
             <a:r>
-              <a:rPr lang="zh-TW" altLang="en-US" smtClean="0"/>
+              <a:rPr lang="zh-TW" altLang="en-US"/>
               <a:t>第四層</a:t>
             </a:r>
           </a:p>
           <a:p>
             <a:pPr lvl="4"/>
             <a:r>
-              <a:rPr lang="zh-TW" altLang="en-US" smtClean="0"/>
+              <a:rPr lang="zh-TW" altLang="en-US"/>
               <a:t>第五層</a:t>
             </a:r>
-            <a:endParaRPr lang="zh-TW" altLang="en-US"/>
           </a:p>
         </p:txBody>
       </p:sp>
@@ -1629,7 +1636,7 @@
           <a:p>
             <a:pPr lvl="0"/>
             <a:r>
-              <a:rPr lang="zh-TW" altLang="en-US" smtClean="0"/>
+              <a:rPr lang="zh-TW" altLang="en-US"/>
               <a:t>按一下以編輯母片文字樣式</a:t>
             </a:r>
           </a:p>
@@ -1685,38 +1692,37 @@
           <a:p>
             <a:pPr lvl="0"/>
             <a:r>
-              <a:rPr lang="zh-TW" altLang="en-US" smtClean="0"/>
+              <a:rPr lang="zh-TW" altLang="en-US"/>
               <a:t>按一下以編輯母片文字樣式</a:t>
             </a:r>
           </a:p>
           <a:p>
             <a:pPr lvl="1"/>
             <a:r>
-              <a:rPr lang="zh-TW" altLang="en-US" smtClean="0"/>
+              <a:rPr lang="zh-TW" altLang="en-US"/>
               <a:t>第二層</a:t>
             </a:r>
           </a:p>
           <a:p>
             <a:pPr lvl="2"/>
             <a:r>
-              <a:rPr lang="zh-TW" altLang="en-US" smtClean="0"/>
+              <a:rPr lang="zh-TW" altLang="en-US"/>
               <a:t>第三層</a:t>
             </a:r>
           </a:p>
           <a:p>
             <a:pPr lvl="3"/>
             <a:r>
-              <a:rPr lang="zh-TW" altLang="en-US" smtClean="0"/>
+              <a:rPr lang="zh-TW" altLang="en-US"/>
               <a:t>第四層</a:t>
             </a:r>
           </a:p>
           <a:p>
             <a:pPr lvl="4"/>
             <a:r>
-              <a:rPr lang="zh-TW" altLang="en-US" smtClean="0"/>
+              <a:rPr lang="zh-TW" altLang="en-US"/>
               <a:t>第五層</a:t>
             </a:r>
-            <a:endParaRPr lang="zh-TW" altLang="en-US"/>
           </a:p>
         </p:txBody>
       </p:sp>
@@ -1737,7 +1743,7 @@
           <a:p>
             <a:fld id="{DDAFCC2C-F392-4357-BF97-16B7A3B9A502}" type="datetimeFigureOut">
               <a:rPr lang="zh-TW" altLang="en-US" smtClean="0"/>
-              <a:t>2020/8/27</a:t>
+              <a:t>2025/7/19</a:t>
             </a:fld>
             <a:endParaRPr lang="zh-TW" altLang="en-US"/>
           </a:p>
@@ -1826,10 +1832,9 @@
           <a:lstStyle/>
           <a:p>
             <a:r>
-              <a:rPr lang="zh-TW" altLang="en-US" smtClean="0"/>
+              <a:rPr lang="zh-TW" altLang="en-US"/>
               <a:t>按一下以編輯母片標題樣式</a:t>
             </a:r>
-            <a:endParaRPr lang="zh-TW" altLang="en-US"/>
           </a:p>
         </p:txBody>
       </p:sp>
@@ -1850,7 +1855,7 @@
           <a:p>
             <a:fld id="{DDAFCC2C-F392-4357-BF97-16B7A3B9A502}" type="datetimeFigureOut">
               <a:rPr lang="zh-TW" altLang="en-US" smtClean="0"/>
-              <a:t>2020/8/27</a:t>
+              <a:t>2025/7/19</a:t>
             </a:fld>
             <a:endParaRPr lang="zh-TW" altLang="en-US"/>
           </a:p>
@@ -1940,7 +1945,7 @@
           <a:p>
             <a:fld id="{DDAFCC2C-F392-4357-BF97-16B7A3B9A502}" type="datetimeFigureOut">
               <a:rPr lang="zh-TW" altLang="en-US" smtClean="0"/>
-              <a:t>2020/8/27</a:t>
+              <a:t>2025/7/19</a:t>
             </a:fld>
             <a:endParaRPr lang="zh-TW" altLang="en-US"/>
           </a:p>
@@ -2038,10 +2043,9 @@
           </a:lstStyle>
           <a:p>
             <a:r>
-              <a:rPr lang="zh-TW" altLang="en-US" smtClean="0"/>
+              <a:rPr lang="zh-TW" altLang="en-US"/>
               <a:t>按一下以編輯母片標題樣式</a:t>
             </a:r>
-            <a:endParaRPr lang="zh-TW" altLang="en-US"/>
           </a:p>
         </p:txBody>
       </p:sp>
@@ -2095,38 +2099,37 @@
           <a:p>
             <a:pPr lvl="0"/>
             <a:r>
-              <a:rPr lang="zh-TW" altLang="en-US" smtClean="0"/>
+              <a:rPr lang="zh-TW" altLang="en-US"/>
               <a:t>按一下以編輯母片文字樣式</a:t>
             </a:r>
           </a:p>
           <a:p>
             <a:pPr lvl="1"/>
             <a:r>
-              <a:rPr lang="zh-TW" altLang="en-US" smtClean="0"/>
+              <a:rPr lang="zh-TW" altLang="en-US"/>
               <a:t>第二層</a:t>
             </a:r>
           </a:p>
           <a:p>
             <a:pPr lvl="2"/>
             <a:r>
-              <a:rPr lang="zh-TW" altLang="en-US" smtClean="0"/>
+              <a:rPr lang="zh-TW" altLang="en-US"/>
               <a:t>第三層</a:t>
             </a:r>
           </a:p>
           <a:p>
             <a:pPr lvl="3"/>
             <a:r>
-              <a:rPr lang="zh-TW" altLang="en-US" smtClean="0"/>
+              <a:rPr lang="zh-TW" altLang="en-US"/>
               <a:t>第四層</a:t>
             </a:r>
           </a:p>
           <a:p>
             <a:pPr lvl="4"/>
             <a:r>
-              <a:rPr lang="zh-TW" altLang="en-US" smtClean="0"/>
+              <a:rPr lang="zh-TW" altLang="en-US"/>
               <a:t>第五層</a:t>
             </a:r>
-            <a:endParaRPr lang="zh-TW" altLang="en-US"/>
           </a:p>
         </p:txBody>
       </p:sp>
@@ -2189,7 +2192,7 @@
           <a:p>
             <a:pPr lvl="0"/>
             <a:r>
-              <a:rPr lang="zh-TW" altLang="en-US" smtClean="0"/>
+              <a:rPr lang="zh-TW" altLang="en-US"/>
               <a:t>按一下以編輯母片文字樣式</a:t>
             </a:r>
           </a:p>
@@ -2212,7 +2215,7 @@
           <a:p>
             <a:fld id="{DDAFCC2C-F392-4357-BF97-16B7A3B9A502}" type="datetimeFigureOut">
               <a:rPr lang="zh-TW" altLang="en-US" smtClean="0"/>
-              <a:t>2020/8/27</a:t>
+              <a:t>2025/7/19</a:t>
             </a:fld>
             <a:endParaRPr lang="zh-TW" altLang="en-US"/>
           </a:p>
@@ -2310,10 +2313,9 @@
           </a:lstStyle>
           <a:p>
             <a:r>
-              <a:rPr lang="zh-TW" altLang="en-US" smtClean="0"/>
+              <a:rPr lang="zh-TW" altLang="en-US"/>
               <a:t>按一下以編輯母片標題樣式</a:t>
             </a:r>
-            <a:endParaRPr lang="zh-TW" altLang="en-US"/>
           </a:p>
         </p:txBody>
       </p:sp>
@@ -2375,10 +2377,9 @@
           </a:lstStyle>
           <a:p>
             <a:r>
-              <a:rPr lang="zh-TW" altLang="en-US" smtClean="0"/>
+              <a:rPr lang="zh-TW" altLang="en-US"/>
               <a:t>按一下圖示以新增圖片</a:t>
             </a:r>
-            <a:endParaRPr lang="zh-TW" altLang="en-US"/>
           </a:p>
         </p:txBody>
       </p:sp>
@@ -2441,7 +2442,7 @@
           <a:p>
             <a:pPr lvl="0"/>
             <a:r>
-              <a:rPr lang="zh-TW" altLang="en-US" smtClean="0"/>
+              <a:rPr lang="zh-TW" altLang="en-US"/>
               <a:t>按一下以編輯母片文字樣式</a:t>
             </a:r>
           </a:p>
@@ -2464,7 +2465,7 @@
           <a:p>
             <a:fld id="{DDAFCC2C-F392-4357-BF97-16B7A3B9A502}" type="datetimeFigureOut">
               <a:rPr lang="zh-TW" altLang="en-US" smtClean="0"/>
-              <a:t>2020/8/27</a:t>
+              <a:t>2025/7/19</a:t>
             </a:fld>
             <a:endParaRPr lang="zh-TW" altLang="en-US"/>
           </a:p>
@@ -2573,10 +2574,9 @@
           <a:lstStyle/>
           <a:p>
             <a:r>
-              <a:rPr lang="zh-TW" altLang="en-US" smtClean="0"/>
+              <a:rPr lang="zh-TW" altLang="en-US"/>
               <a:t>按一下以編輯母片標題樣式</a:t>
             </a:r>
-            <a:endParaRPr lang="zh-TW" altLang="en-US"/>
           </a:p>
         </p:txBody>
       </p:sp>
@@ -2607,38 +2607,37 @@
           <a:p>
             <a:pPr lvl="0"/>
             <a:r>
-              <a:rPr lang="zh-TW" altLang="en-US" smtClean="0"/>
+              <a:rPr lang="zh-TW" altLang="en-US"/>
               <a:t>按一下以編輯母片文字樣式</a:t>
             </a:r>
           </a:p>
           <a:p>
             <a:pPr lvl="1"/>
             <a:r>
-              <a:rPr lang="zh-TW" altLang="en-US" smtClean="0"/>
+              <a:rPr lang="zh-TW" altLang="en-US"/>
               <a:t>第二層</a:t>
             </a:r>
           </a:p>
           <a:p>
             <a:pPr lvl="2"/>
             <a:r>
-              <a:rPr lang="zh-TW" altLang="en-US" smtClean="0"/>
+              <a:rPr lang="zh-TW" altLang="en-US"/>
               <a:t>第三層</a:t>
             </a:r>
           </a:p>
           <a:p>
             <a:pPr lvl="3"/>
             <a:r>
-              <a:rPr lang="zh-TW" altLang="en-US" smtClean="0"/>
+              <a:rPr lang="zh-TW" altLang="en-US"/>
               <a:t>第四層</a:t>
             </a:r>
           </a:p>
           <a:p>
             <a:pPr lvl="4"/>
             <a:r>
-              <a:rPr lang="zh-TW" altLang="en-US" smtClean="0"/>
+              <a:rPr lang="zh-TW" altLang="en-US"/>
               <a:t>第五層</a:t>
             </a:r>
-            <a:endParaRPr lang="zh-TW" altLang="en-US"/>
           </a:p>
         </p:txBody>
       </p:sp>
@@ -2677,7 +2676,7 @@
           <a:p>
             <a:fld id="{DDAFCC2C-F392-4357-BF97-16B7A3B9A502}" type="datetimeFigureOut">
               <a:rPr lang="zh-TW" altLang="en-US" smtClean="0"/>
-              <a:t>2020/8/27</a:t>
+              <a:t>2025/7/19</a:t>
             </a:fld>
             <a:endParaRPr lang="zh-TW" altLang="en-US"/>
           </a:p>
@@ -3035,7 +3034,13 @@
   <p:cSld>
     <p:spTree>
       <p:nvGrpSpPr>
-        <p:cNvPr id="1" name=""/>
+        <p:cNvPr id="1" name="">
+          <a:extLst>
+            <a:ext uri="{FF2B5EF4-FFF2-40B4-BE49-F238E27FC236}">
+              <a16:creationId xmlns:a16="http://schemas.microsoft.com/office/drawing/2014/main" id="{5F20F3D7-EDDF-CE30-9060-314A88E3730B}"/>
+            </a:ext>
+          </a:extLst>
+        </p:cNvPr>
         <p:cNvGrpSpPr/>
         <p:nvPr/>
       </p:nvGrpSpPr>
@@ -3049,7 +3054,13 @@
       </p:grpSpPr>
       <p:sp>
         <p:nvSpPr>
-          <p:cNvPr id="2" name="標題 1"/>
+          <p:cNvPr id="4" name="標題 3">
+            <a:extLst>
+              <a:ext uri="{FF2B5EF4-FFF2-40B4-BE49-F238E27FC236}">
+                <a16:creationId xmlns:a16="http://schemas.microsoft.com/office/drawing/2014/main" id="{CD6A41DD-B5E6-D530-EC0F-85726817D119}"/>
+              </a:ext>
+            </a:extLst>
+          </p:cNvPr>
           <p:cNvSpPr>
             <a:spLocks noGrp="1"/>
           </p:cNvSpPr>
@@ -3057,162 +3068,44 @@
             <p:ph type="title"/>
           </p:nvPr>
         </p:nvSpPr>
-        <p:spPr/>
+        <p:spPr>
+          <a:xfrm>
+            <a:off x="0" y="1995686"/>
+            <a:ext cx="9144000" cy="857250"/>
+          </a:xfrm>
+        </p:spPr>
         <p:txBody>
           <a:bodyPr>
-            <a:normAutofit/>
+            <a:noAutofit/>
           </a:bodyPr>
           <a:lstStyle/>
           <a:p>
             <a:r>
-              <a:rPr lang="zh-TW" altLang="en-US" sz="4000" b="1" dirty="0" smtClean="0">
+              <a:rPr lang="zh-TW" altLang="en-US" sz="5400" b="1" i="1" dirty="0">
+                <a:solidFill>
+                  <a:srgbClr val="000066"/>
+                </a:solidFill>
+                <a:effectLst>
+                  <a:outerShdw blurRad="38100" dist="38100" dir="2700000" algn="tl">
+                    <a:srgbClr val="000000">
+                      <a:alpha val="43137"/>
+                    </a:srgbClr>
+                  </a:outerShdw>
+                </a:effectLst>
                 <a:latin typeface="微軟正黑體" pitchFamily="34" charset="-120"/>
                 <a:ea typeface="微軟正黑體" pitchFamily="34" charset="-120"/>
               </a:rPr>
               <a:t>平安</a:t>
             </a:r>
-            <a:endParaRPr lang="zh-TW" altLang="en-US" sz="4000" b="1" dirty="0">
-              <a:latin typeface="微軟正黑體" pitchFamily="34" charset="-120"/>
-              <a:ea typeface="微軟正黑體" pitchFamily="34" charset="-120"/>
-            </a:endParaRPr>
-          </a:p>
-        </p:txBody>
-      </p:sp>
-      <p:sp>
-        <p:nvSpPr>
-          <p:cNvPr id="3" name="內容版面配置區 2"/>
-          <p:cNvSpPr>
-            <a:spLocks noGrp="1"/>
-          </p:cNvSpPr>
-          <p:nvPr>
-            <p:ph idx="1"/>
-          </p:nvPr>
-        </p:nvSpPr>
-        <p:spPr/>
-        <p:txBody>
-          <a:bodyPr>
-            <a:normAutofit/>
-          </a:bodyPr>
-          <a:lstStyle/>
-          <a:p>
-            <a:pPr algn="ctr">
-              <a:buNone/>
-            </a:pPr>
-            <a:r>
-              <a:rPr lang="zh-TW" altLang="en-US" sz="4400" b="1" dirty="0" smtClean="0">
-                <a:latin typeface="微軟正黑體" pitchFamily="34" charset="-120"/>
-                <a:ea typeface="微軟正黑體" pitchFamily="34" charset="-120"/>
-              </a:rPr>
-              <a:t>就算世界刮著狂風暴雨 </a:t>
-            </a:r>
-            <a:endParaRPr lang="en-US" altLang="zh-TW" sz="4400" b="1" dirty="0" smtClean="0">
-              <a:latin typeface="微軟正黑體" pitchFamily="34" charset="-120"/>
-              <a:ea typeface="微軟正黑體" pitchFamily="34" charset="-120"/>
-            </a:endParaRPr>
-          </a:p>
-          <a:p>
-            <a:pPr algn="ctr">
-              <a:buNone/>
-            </a:pPr>
-            <a:r>
-              <a:rPr lang="zh-TW" altLang="en-US" sz="4400" b="1" dirty="0" smtClean="0">
-                <a:latin typeface="微軟正黑體" pitchFamily="34" charset="-120"/>
-                <a:ea typeface="微軟正黑體" pitchFamily="34" charset="-120"/>
-              </a:rPr>
-              <a:t>我</a:t>
-            </a:r>
-            <a:r>
-              <a:rPr lang="zh-TW" altLang="en-US" sz="4400" b="1" dirty="0" smtClean="0">
-                <a:latin typeface="微軟正黑體" pitchFamily="34" charset="-120"/>
-                <a:ea typeface="微軟正黑體" pitchFamily="34" charset="-120"/>
-              </a:rPr>
-              <a:t>心仍是穩妥安舒 </a:t>
-            </a:r>
-            <a:endParaRPr lang="en-US" altLang="zh-TW" sz="4400" b="1" dirty="0" smtClean="0">
-              <a:latin typeface="微軟正黑體" pitchFamily="34" charset="-120"/>
-              <a:ea typeface="微軟正黑體" pitchFamily="34" charset="-120"/>
-            </a:endParaRPr>
-          </a:p>
-          <a:p>
-            <a:pPr algn="ctr">
-              <a:buNone/>
-            </a:pPr>
-            <a:r>
-              <a:rPr lang="zh-TW" altLang="en-US" sz="4400" b="1" dirty="0" smtClean="0">
-                <a:latin typeface="微軟正黑體" pitchFamily="34" charset="-120"/>
-                <a:ea typeface="微軟正黑體" pitchFamily="34" charset="-120"/>
-              </a:rPr>
-              <a:t>無論</a:t>
-            </a:r>
-            <a:r>
-              <a:rPr lang="zh-TW" altLang="en-US" sz="4400" b="1" dirty="0" smtClean="0">
-                <a:latin typeface="微軟正黑體" pitchFamily="34" charset="-120"/>
-                <a:ea typeface="微軟正黑體" pitchFamily="34" charset="-120"/>
-              </a:rPr>
-              <a:t>前路灰暗 憂傷困倦 </a:t>
-            </a:r>
-            <a:endParaRPr lang="en-US" altLang="zh-TW" sz="4400" b="1" dirty="0" smtClean="0">
-              <a:latin typeface="微軟正黑體" pitchFamily="34" charset="-120"/>
-              <a:ea typeface="微軟正黑體" pitchFamily="34" charset="-120"/>
-            </a:endParaRPr>
-          </a:p>
-          <a:p>
-            <a:pPr algn="ctr">
-              <a:buNone/>
-            </a:pPr>
-            <a:r>
-              <a:rPr lang="zh-TW" altLang="en-US" sz="4400" b="1" dirty="0" smtClean="0">
-                <a:latin typeface="微軟正黑體" pitchFamily="34" charset="-120"/>
-                <a:ea typeface="微軟正黑體" pitchFamily="34" charset="-120"/>
-              </a:rPr>
-              <a:t>祢</a:t>
-            </a:r>
-            <a:r>
-              <a:rPr lang="zh-TW" altLang="en-US" sz="4400" b="1" dirty="0" smtClean="0">
-                <a:latin typeface="微軟正黑體" pitchFamily="34" charset="-120"/>
-                <a:ea typeface="微軟正黑體" pitchFamily="34" charset="-120"/>
-              </a:rPr>
-              <a:t>讓我站穩 磐石之處</a:t>
-            </a:r>
-            <a:endParaRPr lang="zh-TW" altLang="en-US" sz="4400" b="1" dirty="0">
-              <a:latin typeface="微軟正黑體" pitchFamily="34" charset="-120"/>
-              <a:ea typeface="微軟正黑體" pitchFamily="34" charset="-120"/>
-            </a:endParaRPr>
-          </a:p>
-        </p:txBody>
-      </p:sp>
-      <p:sp>
-        <p:nvSpPr>
-          <p:cNvPr id="4" name="文字方塊 3"/>
-          <p:cNvSpPr txBox="1"/>
-          <p:nvPr/>
-        </p:nvSpPr>
-        <p:spPr>
-          <a:xfrm>
-            <a:off x="0" y="4500576"/>
-            <a:ext cx="9144000" cy="400110"/>
-          </a:xfrm>
-          <a:prstGeom prst="rect">
-            <a:avLst/>
-          </a:prstGeom>
-          <a:noFill/>
-        </p:spPr>
-        <p:txBody>
-          <a:bodyPr wrap="square" rtlCol="0">
-            <a:spAutoFit/>
-          </a:bodyPr>
-          <a:lstStyle/>
-          <a:p>
-            <a:pPr algn="ctr"/>
-            <a:r>
-              <a:rPr lang="en-US" altLang="zh-TW" sz="2000" b="1" dirty="0" smtClean="0"/>
-              <a:t>( Verse 1 )</a:t>
-            </a:r>
-            <a:endParaRPr lang="zh-TW" altLang="en-US" sz="2000" b="1" dirty="0"/>
           </a:p>
         </p:txBody>
       </p:sp>
     </p:spTree>
+    <p:extLst>
+      <p:ext uri="{BB962C8B-B14F-4D97-AF65-F5344CB8AC3E}">
+        <p14:creationId xmlns:p14="http://schemas.microsoft.com/office/powerpoint/2010/main" val="388492399"/>
+      </p:ext>
+    </p:extLst>
   </p:cSld>
   <p:clrMapOvr>
     <a:masterClrMapping/>
@@ -3225,7 +3118,13 @@
   <p:cSld>
     <p:spTree>
       <p:nvGrpSpPr>
-        <p:cNvPr id="1" name=""/>
+        <p:cNvPr id="1" name="">
+          <a:extLst>
+            <a:ext uri="{FF2B5EF4-FFF2-40B4-BE49-F238E27FC236}">
+              <a16:creationId xmlns:a16="http://schemas.microsoft.com/office/drawing/2014/main" id="{499F6A04-361B-D03C-72FC-83746A3861FC}"/>
+            </a:ext>
+          </a:extLst>
+        </p:cNvPr>
         <p:cNvGrpSpPr/>
         <p:nvPr/>
       </p:nvGrpSpPr>
@@ -3239,123 +3138,79 @@
       </p:grpSpPr>
       <p:sp>
         <p:nvSpPr>
-          <p:cNvPr id="2" name="標題 1"/>
-          <p:cNvSpPr>
-            <a:spLocks noGrp="1"/>
-          </p:cNvSpPr>
-          <p:nvPr>
-            <p:ph type="title"/>
-          </p:nvPr>
-        </p:nvSpPr>
-        <p:spPr/>
-        <p:txBody>
-          <a:bodyPr>
+          <p:cNvPr id="5" name="內容版面配置區 4">
+            <a:extLst>
+              <a:ext uri="{FF2B5EF4-FFF2-40B4-BE49-F238E27FC236}">
+                <a16:creationId xmlns:a16="http://schemas.microsoft.com/office/drawing/2014/main" id="{EE77592B-EE8B-614D-4160-CDFC7BCE80DB}"/>
+              </a:ext>
+            </a:extLst>
+          </p:cNvPr>
+          <p:cNvSpPr>
+            <a:spLocks noGrp="1"/>
+          </p:cNvSpPr>
+          <p:nvPr>
+            <p:ph idx="1"/>
+          </p:nvPr>
+        </p:nvSpPr>
+        <p:spPr>
+          <a:xfrm>
+            <a:off x="0" y="1563639"/>
+            <a:ext cx="9144000" cy="1803647"/>
+          </a:xfrm>
+        </p:spPr>
+        <p:txBody>
+          <a:bodyPr anchor="ctr">
             <a:normAutofit/>
           </a:bodyPr>
           <a:lstStyle/>
           <a:p>
-            <a:r>
-              <a:rPr lang="zh-TW" altLang="en-US" sz="4000" b="1" dirty="0" smtClean="0">
+            <a:pPr algn="ctr">
+              <a:buNone/>
+            </a:pPr>
+            <a:r>
+              <a:rPr lang="zh-TW" altLang="en-US" sz="4800" b="1" dirty="0">
+                <a:solidFill>
+                  <a:srgbClr val="000066"/>
+                </a:solidFill>
                 <a:latin typeface="微軟正黑體" pitchFamily="34" charset="-120"/>
                 <a:ea typeface="微軟正黑體" pitchFamily="34" charset="-120"/>
               </a:rPr>
-              <a:t>平安</a:t>
-            </a:r>
-            <a:endParaRPr lang="zh-TW" altLang="en-US" sz="4000" b="1" dirty="0">
-              <a:latin typeface="微軟正黑體" pitchFamily="34" charset="-120"/>
-              <a:ea typeface="微軟正黑體" pitchFamily="34" charset="-120"/>
-            </a:endParaRPr>
-          </a:p>
-        </p:txBody>
-      </p:sp>
-      <p:sp>
-        <p:nvSpPr>
-          <p:cNvPr id="3" name="內容版面配置區 2"/>
-          <p:cNvSpPr>
-            <a:spLocks noGrp="1"/>
-          </p:cNvSpPr>
-          <p:nvPr>
-            <p:ph idx="1"/>
-          </p:nvPr>
-        </p:nvSpPr>
-        <p:spPr/>
-        <p:txBody>
-          <a:bodyPr>
-            <a:normAutofit/>
-          </a:bodyPr>
-          <a:lstStyle/>
+              <a:t>就算世界刮著狂風暴雨 </a:t>
+            </a:r>
+          </a:p>
           <a:p>
             <a:pPr algn="ctr">
               <a:buNone/>
             </a:pPr>
             <a:r>
-              <a:rPr lang="zh-TW" altLang="en-US" sz="4400" b="1" dirty="0" smtClean="0">
+              <a:rPr lang="zh-TW" altLang="en-US" sz="4800" b="1" dirty="0">
+                <a:solidFill>
+                  <a:srgbClr val="000066"/>
+                </a:solidFill>
                 <a:latin typeface="微軟正黑體" pitchFamily="34" charset="-120"/>
                 <a:ea typeface="微軟正黑體" pitchFamily="34" charset="-120"/>
               </a:rPr>
-              <a:t>就算捆鎖劫難縈繞著我 </a:t>
-            </a:r>
-            <a:endParaRPr lang="en-US" altLang="zh-TW" sz="4400" b="1" dirty="0" smtClean="0">
-              <a:latin typeface="微軟正黑體" pitchFamily="34" charset="-120"/>
-              <a:ea typeface="微軟正黑體" pitchFamily="34" charset="-120"/>
-            </a:endParaRPr>
-          </a:p>
-          <a:p>
-            <a:pPr algn="ctr">
-              <a:buNone/>
-            </a:pPr>
-            <a:r>
-              <a:rPr lang="zh-TW" altLang="en-US" sz="4400" b="1" dirty="0" smtClean="0">
-                <a:latin typeface="微軟正黑體" pitchFamily="34" charset="-120"/>
-                <a:ea typeface="微軟正黑體" pitchFamily="34" charset="-120"/>
-              </a:rPr>
-              <a:t>我心藏著不死盼望</a:t>
-            </a:r>
-            <a:endParaRPr lang="en-US" altLang="zh-TW" sz="4400" b="1" dirty="0" smtClean="0">
-              <a:latin typeface="微軟正黑體" pitchFamily="34" charset="-120"/>
-              <a:ea typeface="微軟正黑體" pitchFamily="34" charset="-120"/>
-            </a:endParaRPr>
-          </a:p>
-          <a:p>
-            <a:pPr algn="ctr">
-              <a:buNone/>
-            </a:pPr>
-            <a:r>
-              <a:rPr lang="zh-TW" altLang="en-US" sz="4400" b="1" dirty="0" smtClean="0">
-                <a:latin typeface="微軟正黑體" pitchFamily="34" charset="-120"/>
-                <a:ea typeface="微軟正黑體" pitchFamily="34" charset="-120"/>
-              </a:rPr>
-              <a:t>耶穌是我牧者 永在我旁</a:t>
-            </a:r>
-            <a:endParaRPr lang="en-US" altLang="zh-TW" sz="4400" b="1" dirty="0" smtClean="0">
-              <a:latin typeface="微軟正黑體" pitchFamily="34" charset="-120"/>
-              <a:ea typeface="微軟正黑體" pitchFamily="34" charset="-120"/>
-            </a:endParaRPr>
-          </a:p>
-          <a:p>
-            <a:pPr algn="ctr">
-              <a:buNone/>
-            </a:pPr>
-            <a:r>
-              <a:rPr lang="zh-TW" altLang="en-US" sz="4400" b="1" dirty="0" smtClean="0">
-                <a:latin typeface="微軟正黑體" pitchFamily="34" charset="-120"/>
-                <a:ea typeface="微軟正黑體" pitchFamily="34" charset="-120"/>
-              </a:rPr>
-              <a:t>祢杖祢竿都安慰我</a:t>
-            </a:r>
-          </a:p>
-        </p:txBody>
-      </p:sp>
-      <p:sp>
-        <p:nvSpPr>
-          <p:cNvPr id="4" name="文字方塊 3"/>
+              <a:t>我心仍是穩妥安舒 </a:t>
+            </a:r>
+          </a:p>
+        </p:txBody>
+      </p:sp>
+      <p:sp>
+        <p:nvSpPr>
+          <p:cNvPr id="3" name="TextBox 2">
+            <a:extLst>
+              <a:ext uri="{FF2B5EF4-FFF2-40B4-BE49-F238E27FC236}">
+                <a16:creationId xmlns:a16="http://schemas.microsoft.com/office/drawing/2014/main" id="{FA175DD0-F211-14DE-420F-4A50F79B6BD2}"/>
+              </a:ext>
+            </a:extLst>
+          </p:cNvPr>
           <p:cNvSpPr txBox="1"/>
           <p:nvPr/>
         </p:nvSpPr>
         <p:spPr>
           <a:xfrm>
-            <a:off x="0" y="4500576"/>
-            <a:ext cx="9144000" cy="400110"/>
+            <a:off x="0" y="3867895"/>
+            <a:ext cx="9144000" cy="461665"/>
           </a:xfrm>
           <a:prstGeom prst="rect">
             <a:avLst/>
@@ -3370,14 +3225,60 @@
           <a:p>
             <a:pPr algn="ctr"/>
             <a:r>
-              <a:rPr lang="en-US" altLang="zh-TW" sz="2000" b="1" dirty="0" smtClean="0"/>
-              <a:t>( Verse 2 )</a:t>
-            </a:r>
-            <a:endParaRPr lang="zh-TW" altLang="en-US" sz="2000" b="1" dirty="0"/>
+              <a:rPr lang="en-US" sz="2400" b="1" dirty="0">
+                <a:solidFill>
+                  <a:srgbClr val="000066"/>
+                </a:solidFill>
+                <a:latin typeface="Microsoft JhengHei" panose="020B0604030504040204" pitchFamily="34" charset="-120"/>
+                <a:ea typeface="Microsoft JhengHei" panose="020B0604030504040204" pitchFamily="34" charset="-120"/>
+              </a:rPr>
+              <a:t>( </a:t>
+            </a:r>
+            <a:r>
+              <a:rPr lang="zh-CN" altLang="en-US" sz="2400" b="1" dirty="0">
+                <a:solidFill>
+                  <a:srgbClr val="000066"/>
+                </a:solidFill>
+                <a:latin typeface="Microsoft JhengHei" panose="020B0604030504040204" pitchFamily="34" charset="-120"/>
+                <a:ea typeface="Microsoft JhengHei" panose="020B0604030504040204" pitchFamily="34" charset="-120"/>
+              </a:rPr>
+              <a:t>正歌 </a:t>
+            </a:r>
+            <a:r>
+              <a:rPr lang="en-US" altLang="zh-CN" sz="2400" b="1" dirty="0">
+                <a:solidFill>
+                  <a:srgbClr val="000066"/>
+                </a:solidFill>
+                <a:latin typeface="Microsoft JhengHei" panose="020B0604030504040204" pitchFamily="34" charset="-120"/>
+                <a:ea typeface="Microsoft JhengHei" panose="020B0604030504040204" pitchFamily="34" charset="-120"/>
+              </a:rPr>
+              <a:t>1</a:t>
+            </a:r>
+            <a:r>
+              <a:rPr lang="en-US" sz="2400" b="1" dirty="0">
+                <a:solidFill>
+                  <a:srgbClr val="000066"/>
+                </a:solidFill>
+                <a:latin typeface="Microsoft JhengHei" panose="020B0604030504040204" pitchFamily="34" charset="-120"/>
+                <a:ea typeface="Microsoft JhengHei" panose="020B0604030504040204" pitchFamily="34" charset="-120"/>
+              </a:rPr>
+              <a:t> )</a:t>
+            </a:r>
+            <a:endParaRPr lang="vi-VN" sz="2400" b="1" dirty="0">
+              <a:solidFill>
+                <a:srgbClr val="000066"/>
+              </a:solidFill>
+              <a:ea typeface="Microsoft JhengHei" panose="020B0604030504040204" pitchFamily="34" charset="-120"/>
+            </a:endParaRPr>
           </a:p>
         </p:txBody>
       </p:sp>
     </p:spTree>
+    <p:extLst>
+      <p:ext uri="{BB962C8B-B14F-4D97-AF65-F5344CB8AC3E}">
+        <p14:creationId xmlns:p14="http://schemas.microsoft.com/office/powerpoint/2010/main" val="3885075056"/>
+      </p:ext>
+    </p:extLst>
   </p:cSld>
   <p:clrMapOvr>
     <a:masterClrMapping/>
@@ -3390,7 +3291,13 @@
   <p:cSld>
     <p:spTree>
       <p:nvGrpSpPr>
-        <p:cNvPr id="1" name=""/>
+        <p:cNvPr id="1" name="">
+          <a:extLst>
+            <a:ext uri="{FF2B5EF4-FFF2-40B4-BE49-F238E27FC236}">
+              <a16:creationId xmlns:a16="http://schemas.microsoft.com/office/drawing/2014/main" id="{19CB87D2-1F4F-1F01-85DB-FC97763DA5B5}"/>
+            </a:ext>
+          </a:extLst>
+        </p:cNvPr>
         <p:cNvGrpSpPr/>
         <p:nvPr/>
       </p:nvGrpSpPr>
@@ -3404,137 +3311,79 @@
       </p:grpSpPr>
       <p:sp>
         <p:nvSpPr>
-          <p:cNvPr id="2" name="標題 1"/>
-          <p:cNvSpPr>
-            <a:spLocks noGrp="1"/>
-          </p:cNvSpPr>
-          <p:nvPr>
-            <p:ph type="title"/>
-          </p:nvPr>
-        </p:nvSpPr>
-        <p:spPr/>
-        <p:txBody>
-          <a:bodyPr>
+          <p:cNvPr id="5" name="內容版面配置區 4">
+            <a:extLst>
+              <a:ext uri="{FF2B5EF4-FFF2-40B4-BE49-F238E27FC236}">
+                <a16:creationId xmlns:a16="http://schemas.microsoft.com/office/drawing/2014/main" id="{31C0FE61-C2C9-7121-FADF-5C68CA92F552}"/>
+              </a:ext>
+            </a:extLst>
+          </p:cNvPr>
+          <p:cNvSpPr>
+            <a:spLocks noGrp="1"/>
+          </p:cNvSpPr>
+          <p:nvPr>
+            <p:ph idx="1"/>
+          </p:nvPr>
+        </p:nvSpPr>
+        <p:spPr>
+          <a:xfrm>
+            <a:off x="0" y="1563639"/>
+            <a:ext cx="9144000" cy="1803647"/>
+          </a:xfrm>
+        </p:spPr>
+        <p:txBody>
+          <a:bodyPr anchor="ctr">
             <a:normAutofit/>
           </a:bodyPr>
           <a:lstStyle/>
           <a:p>
-            <a:r>
-              <a:rPr lang="zh-TW" altLang="en-US" sz="4000" b="1" dirty="0" smtClean="0">
+            <a:pPr algn="ctr">
+              <a:buNone/>
+            </a:pPr>
+            <a:r>
+              <a:rPr lang="zh-TW" altLang="en-US" sz="4800" b="1" dirty="0">
+                <a:solidFill>
+                  <a:srgbClr val="000066"/>
+                </a:solidFill>
                 <a:latin typeface="微軟正黑體" pitchFamily="34" charset="-120"/>
                 <a:ea typeface="微軟正黑體" pitchFamily="34" charset="-120"/>
               </a:rPr>
-              <a:t>平安</a:t>
-            </a:r>
-            <a:endParaRPr lang="zh-TW" altLang="en-US" sz="4000" b="1" dirty="0">
-              <a:latin typeface="微軟正黑體" pitchFamily="34" charset="-120"/>
-              <a:ea typeface="微軟正黑體" pitchFamily="34" charset="-120"/>
-            </a:endParaRPr>
-          </a:p>
-        </p:txBody>
-      </p:sp>
-      <p:sp>
-        <p:nvSpPr>
-          <p:cNvPr id="3" name="內容版面配置區 2"/>
-          <p:cNvSpPr>
-            <a:spLocks noGrp="1"/>
-          </p:cNvSpPr>
-          <p:nvPr>
-            <p:ph idx="1"/>
-          </p:nvPr>
-        </p:nvSpPr>
-        <p:spPr/>
-        <p:txBody>
-          <a:bodyPr>
-            <a:normAutofit/>
-          </a:bodyPr>
-          <a:lstStyle/>
+              <a:t>無論前路灰暗  憂傷困倦 </a:t>
+            </a:r>
+          </a:p>
           <a:p>
             <a:pPr algn="ctr">
               <a:buNone/>
             </a:pPr>
             <a:r>
-              <a:rPr lang="zh-TW" altLang="en-US" sz="4400" b="1" dirty="0" smtClean="0">
+              <a:rPr lang="zh-TW" altLang="en-US" sz="4800" b="1" dirty="0">
+                <a:solidFill>
+                  <a:srgbClr val="000066"/>
+                </a:solidFill>
                 <a:latin typeface="微軟正黑體" pitchFamily="34" charset="-120"/>
                 <a:ea typeface="微軟正黑體" pitchFamily="34" charset="-120"/>
               </a:rPr>
-              <a:t>主 </a:t>
-            </a:r>
-            <a:r>
-              <a:rPr lang="zh-TW" altLang="en-US" sz="4400" b="1" dirty="0" smtClean="0">
-                <a:latin typeface="微軟正黑體" pitchFamily="34" charset="-120"/>
-                <a:ea typeface="微軟正黑體" pitchFamily="34" charset="-120"/>
-              </a:rPr>
-              <a:t> 祢</a:t>
-            </a:r>
-            <a:r>
-              <a:rPr lang="zh-TW" altLang="en-US" sz="4400" b="1" dirty="0" smtClean="0">
-                <a:latin typeface="微軟正黑體" pitchFamily="34" charset="-120"/>
-                <a:ea typeface="微軟正黑體" pitchFamily="34" charset="-120"/>
-              </a:rPr>
-              <a:t>賜下平安</a:t>
-            </a:r>
-            <a:endParaRPr lang="en-US" altLang="zh-TW" sz="4400" b="1" dirty="0" smtClean="0">
-              <a:latin typeface="微軟正黑體" pitchFamily="34" charset="-120"/>
-              <a:ea typeface="微軟正黑體" pitchFamily="34" charset="-120"/>
-            </a:endParaRPr>
-          </a:p>
-          <a:p>
-            <a:pPr algn="ctr">
-              <a:buNone/>
-            </a:pPr>
-            <a:r>
-              <a:rPr lang="zh-TW" altLang="en-US" sz="4400" b="1" dirty="0" smtClean="0">
-                <a:latin typeface="微軟正黑體" pitchFamily="34" charset="-120"/>
-                <a:ea typeface="微軟正黑體" pitchFamily="34" charset="-120"/>
-              </a:rPr>
-              <a:t>不像世人所賜</a:t>
-            </a:r>
-            <a:endParaRPr lang="en-US" altLang="zh-TW" sz="4400" b="1" dirty="0" smtClean="0">
-              <a:latin typeface="微軟正黑體" pitchFamily="34" charset="-120"/>
-              <a:ea typeface="微軟正黑體" pitchFamily="34" charset="-120"/>
-            </a:endParaRPr>
-          </a:p>
-          <a:p>
-            <a:pPr algn="ctr">
-              <a:buNone/>
-            </a:pPr>
-            <a:r>
-              <a:rPr lang="zh-TW" altLang="en-US" sz="4400" b="1" dirty="0" smtClean="0">
-                <a:latin typeface="微軟正黑體" pitchFamily="34" charset="-120"/>
-                <a:ea typeface="微軟正黑體" pitchFamily="34" charset="-120"/>
-              </a:rPr>
-              <a:t>我的心 不必再憂愁</a:t>
-            </a:r>
-            <a:endParaRPr lang="en-US" altLang="zh-TW" sz="4400" b="1" dirty="0" smtClean="0">
-              <a:latin typeface="微軟正黑體" pitchFamily="34" charset="-120"/>
-              <a:ea typeface="微軟正黑體" pitchFamily="34" charset="-120"/>
-            </a:endParaRPr>
-          </a:p>
-          <a:p>
-            <a:pPr algn="ctr">
-              <a:buNone/>
-            </a:pPr>
-            <a:r>
-              <a:rPr lang="zh-TW" altLang="en-US" sz="4400" b="1" dirty="0" smtClean="0">
-                <a:latin typeface="微軟正黑體" pitchFamily="34" charset="-120"/>
-                <a:ea typeface="微軟正黑體" pitchFamily="34" charset="-120"/>
-              </a:rPr>
-              <a:t>也不用膽怯 </a:t>
-            </a:r>
-          </a:p>
-        </p:txBody>
-      </p:sp>
-      <p:sp>
-        <p:nvSpPr>
-          <p:cNvPr id="4" name="文字方塊 3"/>
+              <a:t>祢讓我站穩  磐石之處</a:t>
+            </a:r>
+          </a:p>
+        </p:txBody>
+      </p:sp>
+      <p:sp>
+        <p:nvSpPr>
+          <p:cNvPr id="3" name="TextBox 2">
+            <a:extLst>
+              <a:ext uri="{FF2B5EF4-FFF2-40B4-BE49-F238E27FC236}">
+                <a16:creationId xmlns:a16="http://schemas.microsoft.com/office/drawing/2014/main" id="{83460172-B4D1-49F6-EF0B-D02FCB00B669}"/>
+              </a:ext>
+            </a:extLst>
+          </p:cNvPr>
           <p:cNvSpPr txBox="1"/>
           <p:nvPr/>
         </p:nvSpPr>
         <p:spPr>
           <a:xfrm>
-            <a:off x="0" y="4500576"/>
-            <a:ext cx="9144000" cy="400110"/>
+            <a:off x="0" y="3867895"/>
+            <a:ext cx="9144000" cy="461665"/>
           </a:xfrm>
           <a:prstGeom prst="rect">
             <a:avLst/>
@@ -3549,14 +3398,60 @@
           <a:p>
             <a:pPr algn="ctr"/>
             <a:r>
-              <a:rPr lang="en-US" altLang="zh-TW" sz="2000" b="1" dirty="0" smtClean="0"/>
-              <a:t>( Chorus 1 )</a:t>
-            </a:r>
-            <a:endParaRPr lang="zh-TW" altLang="en-US" sz="2000" b="1" dirty="0"/>
+              <a:rPr lang="en-US" sz="2400" b="1" dirty="0">
+                <a:solidFill>
+                  <a:srgbClr val="000066"/>
+                </a:solidFill>
+                <a:latin typeface="Microsoft JhengHei" panose="020B0604030504040204" pitchFamily="34" charset="-120"/>
+                <a:ea typeface="Microsoft JhengHei" panose="020B0604030504040204" pitchFamily="34" charset="-120"/>
+              </a:rPr>
+              <a:t>( </a:t>
+            </a:r>
+            <a:r>
+              <a:rPr lang="zh-CN" altLang="en-US" sz="2400" b="1" dirty="0">
+                <a:solidFill>
+                  <a:srgbClr val="000066"/>
+                </a:solidFill>
+                <a:latin typeface="Microsoft JhengHei" panose="020B0604030504040204" pitchFamily="34" charset="-120"/>
+                <a:ea typeface="Microsoft JhengHei" panose="020B0604030504040204" pitchFamily="34" charset="-120"/>
+              </a:rPr>
+              <a:t>正歌 </a:t>
+            </a:r>
+            <a:r>
+              <a:rPr lang="en-US" altLang="zh-CN" sz="2400" b="1" dirty="0">
+                <a:solidFill>
+                  <a:srgbClr val="000066"/>
+                </a:solidFill>
+                <a:latin typeface="Microsoft JhengHei" panose="020B0604030504040204" pitchFamily="34" charset="-120"/>
+                <a:ea typeface="Microsoft JhengHei" panose="020B0604030504040204" pitchFamily="34" charset="-120"/>
+              </a:rPr>
+              <a:t>1</a:t>
+            </a:r>
+            <a:r>
+              <a:rPr lang="en-US" sz="2400" b="1" dirty="0">
+                <a:solidFill>
+                  <a:srgbClr val="000066"/>
+                </a:solidFill>
+                <a:latin typeface="Microsoft JhengHei" panose="020B0604030504040204" pitchFamily="34" charset="-120"/>
+                <a:ea typeface="Microsoft JhengHei" panose="020B0604030504040204" pitchFamily="34" charset="-120"/>
+              </a:rPr>
+              <a:t> )</a:t>
+            </a:r>
+            <a:endParaRPr lang="vi-VN" sz="2400" b="1" dirty="0">
+              <a:solidFill>
+                <a:srgbClr val="000066"/>
+              </a:solidFill>
+              <a:ea typeface="Microsoft JhengHei" panose="020B0604030504040204" pitchFamily="34" charset="-120"/>
+            </a:endParaRPr>
           </a:p>
         </p:txBody>
       </p:sp>
     </p:spTree>
+    <p:extLst>
+      <p:ext uri="{BB962C8B-B14F-4D97-AF65-F5344CB8AC3E}">
+        <p14:creationId xmlns:p14="http://schemas.microsoft.com/office/powerpoint/2010/main" val="588686044"/>
+      </p:ext>
+    </p:extLst>
   </p:cSld>
   <p:clrMapOvr>
     <a:masterClrMapping/>
@@ -3569,7 +3464,13 @@
   <p:cSld>
     <p:spTree>
       <p:nvGrpSpPr>
-        <p:cNvPr id="1" name=""/>
+        <p:cNvPr id="1" name="">
+          <a:extLst>
+            <a:ext uri="{FF2B5EF4-FFF2-40B4-BE49-F238E27FC236}">
+              <a16:creationId xmlns:a16="http://schemas.microsoft.com/office/drawing/2014/main" id="{3D3AA252-A912-100D-3FD4-B5036F32F3A7}"/>
+            </a:ext>
+          </a:extLst>
+        </p:cNvPr>
         <p:cNvGrpSpPr/>
         <p:nvPr/>
       </p:nvGrpSpPr>
@@ -3583,123 +3484,79 @@
       </p:grpSpPr>
       <p:sp>
         <p:nvSpPr>
-          <p:cNvPr id="2" name="標題 1"/>
-          <p:cNvSpPr>
-            <a:spLocks noGrp="1"/>
-          </p:cNvSpPr>
-          <p:nvPr>
-            <p:ph type="title"/>
-          </p:nvPr>
-        </p:nvSpPr>
-        <p:spPr/>
-        <p:txBody>
-          <a:bodyPr>
+          <p:cNvPr id="5" name="內容版面配置區 4">
+            <a:extLst>
+              <a:ext uri="{FF2B5EF4-FFF2-40B4-BE49-F238E27FC236}">
+                <a16:creationId xmlns:a16="http://schemas.microsoft.com/office/drawing/2014/main" id="{F4065EA8-9823-105C-AB26-85E5FF3561DB}"/>
+              </a:ext>
+            </a:extLst>
+          </p:cNvPr>
+          <p:cNvSpPr>
+            <a:spLocks noGrp="1"/>
+          </p:cNvSpPr>
+          <p:nvPr>
+            <p:ph idx="1"/>
+          </p:nvPr>
+        </p:nvSpPr>
+        <p:spPr>
+          <a:xfrm>
+            <a:off x="0" y="1563639"/>
+            <a:ext cx="9144000" cy="1803647"/>
+          </a:xfrm>
+        </p:spPr>
+        <p:txBody>
+          <a:bodyPr anchor="ctr">
             <a:normAutofit/>
           </a:bodyPr>
           <a:lstStyle/>
           <a:p>
-            <a:r>
-              <a:rPr lang="zh-TW" altLang="en-US" sz="4000" b="1" dirty="0" smtClean="0">
+            <a:pPr algn="ctr">
+              <a:buNone/>
+            </a:pPr>
+            <a:r>
+              <a:rPr lang="zh-TW" altLang="en-US" sz="4800" b="1" dirty="0">
+                <a:solidFill>
+                  <a:srgbClr val="000066"/>
+                </a:solidFill>
                 <a:latin typeface="微軟正黑體" pitchFamily="34" charset="-120"/>
                 <a:ea typeface="微軟正黑體" pitchFamily="34" charset="-120"/>
               </a:rPr>
-              <a:t>平安</a:t>
-            </a:r>
-            <a:endParaRPr lang="zh-TW" altLang="en-US" sz="4000" b="1" dirty="0">
-              <a:latin typeface="微軟正黑體" pitchFamily="34" charset="-120"/>
-              <a:ea typeface="微軟正黑體" pitchFamily="34" charset="-120"/>
-            </a:endParaRPr>
-          </a:p>
-        </p:txBody>
-      </p:sp>
-      <p:sp>
-        <p:nvSpPr>
-          <p:cNvPr id="3" name="內容版面配置區 2"/>
-          <p:cNvSpPr>
-            <a:spLocks noGrp="1"/>
-          </p:cNvSpPr>
-          <p:nvPr>
-            <p:ph idx="1"/>
-          </p:nvPr>
-        </p:nvSpPr>
-        <p:spPr/>
-        <p:txBody>
-          <a:bodyPr>
-            <a:normAutofit/>
-          </a:bodyPr>
-          <a:lstStyle/>
+              <a:t>主  祢賜下平安</a:t>
+            </a:r>
+          </a:p>
           <a:p>
             <a:pPr algn="ctr">
               <a:buNone/>
             </a:pPr>
             <a:r>
-              <a:rPr lang="zh-TW" altLang="en-US" sz="4400" b="1" dirty="0" smtClean="0">
+              <a:rPr lang="zh-TW" altLang="en-US" sz="4800" b="1" dirty="0">
+                <a:solidFill>
+                  <a:srgbClr val="000066"/>
+                </a:solidFill>
                 <a:latin typeface="微軟正黑體" pitchFamily="34" charset="-120"/>
                 <a:ea typeface="微軟正黑體" pitchFamily="34" charset="-120"/>
               </a:rPr>
-              <a:t>主 祢賜下這</a:t>
-            </a:r>
-            <a:endParaRPr lang="en-US" altLang="zh-TW" sz="4400" b="1" dirty="0" smtClean="0">
-              <a:latin typeface="微軟正黑體" pitchFamily="34" charset="-120"/>
-              <a:ea typeface="微軟正黑體" pitchFamily="34" charset="-120"/>
-            </a:endParaRPr>
-          </a:p>
-          <a:p>
-            <a:pPr algn="ctr">
-              <a:buNone/>
-            </a:pPr>
-            <a:r>
-              <a:rPr lang="zh-TW" altLang="en-US" sz="4400" b="1" dirty="0" smtClean="0">
-                <a:latin typeface="微軟正黑體" pitchFamily="34" charset="-120"/>
-                <a:ea typeface="微軟正黑體" pitchFamily="34" charset="-120"/>
-              </a:rPr>
-              <a:t>是用重價換來的</a:t>
-            </a:r>
-            <a:endParaRPr lang="en-US" altLang="zh-TW" sz="4400" b="1" dirty="0" smtClean="0">
-              <a:latin typeface="微軟正黑體" pitchFamily="34" charset="-120"/>
-              <a:ea typeface="微軟正黑體" pitchFamily="34" charset="-120"/>
-            </a:endParaRPr>
-          </a:p>
-          <a:p>
-            <a:pPr algn="ctr">
-              <a:buNone/>
-            </a:pPr>
-            <a:r>
-              <a:rPr lang="zh-TW" altLang="en-US" sz="4400" b="1" dirty="0" smtClean="0">
-                <a:latin typeface="微軟正黑體" pitchFamily="34" charset="-120"/>
-                <a:ea typeface="微軟正黑體" pitchFamily="34" charset="-120"/>
-              </a:rPr>
-              <a:t>受鞭傷使我得醫治</a:t>
-            </a:r>
-            <a:endParaRPr lang="en-US" altLang="zh-TW" sz="4400" b="1" dirty="0" smtClean="0">
-              <a:latin typeface="微軟正黑體" pitchFamily="34" charset="-120"/>
-              <a:ea typeface="微軟正黑體" pitchFamily="34" charset="-120"/>
-            </a:endParaRPr>
-          </a:p>
-          <a:p>
-            <a:pPr algn="ctr">
-              <a:buNone/>
-            </a:pPr>
-            <a:r>
-              <a:rPr lang="zh-TW" altLang="en-US" sz="4400" b="1" dirty="0" smtClean="0">
-                <a:latin typeface="微軟正黑體" pitchFamily="34" charset="-120"/>
-                <a:ea typeface="微軟正黑體" pitchFamily="34" charset="-120"/>
-              </a:rPr>
-              <a:t>受刑罰讓我得到赦免</a:t>
-            </a:r>
-          </a:p>
-        </p:txBody>
-      </p:sp>
-      <p:sp>
-        <p:nvSpPr>
-          <p:cNvPr id="4" name="文字方塊 3"/>
+              <a:t>不像世人所賜</a:t>
+            </a:r>
+          </a:p>
+        </p:txBody>
+      </p:sp>
+      <p:sp>
+        <p:nvSpPr>
+          <p:cNvPr id="3" name="TextBox 2">
+            <a:extLst>
+              <a:ext uri="{FF2B5EF4-FFF2-40B4-BE49-F238E27FC236}">
+                <a16:creationId xmlns:a16="http://schemas.microsoft.com/office/drawing/2014/main" id="{DBAAA18C-4B3D-1D93-23CD-77E4CA4DBFDA}"/>
+              </a:ext>
+            </a:extLst>
+          </p:cNvPr>
           <p:cNvSpPr txBox="1"/>
           <p:nvPr/>
         </p:nvSpPr>
         <p:spPr>
           <a:xfrm>
-            <a:off x="0" y="4500576"/>
-            <a:ext cx="9144000" cy="400110"/>
+            <a:off x="0" y="3867895"/>
+            <a:ext cx="9144000" cy="461665"/>
           </a:xfrm>
           <a:prstGeom prst="rect">
             <a:avLst/>
@@ -3714,14 +3571,905 @@
           <a:p>
             <a:pPr algn="ctr"/>
             <a:r>
-              <a:rPr lang="en-US" altLang="zh-TW" sz="2000" b="1" dirty="0" smtClean="0"/>
-              <a:t>( Chorus 2 )</a:t>
-            </a:r>
-            <a:endParaRPr lang="zh-TW" altLang="en-US" sz="2000" b="1" dirty="0"/>
+              <a:rPr lang="en-US" sz="2400" b="1" dirty="0">
+                <a:solidFill>
+                  <a:srgbClr val="000066"/>
+                </a:solidFill>
+                <a:latin typeface="Microsoft JhengHei" panose="020B0604030504040204" pitchFamily="34" charset="-120"/>
+                <a:ea typeface="Microsoft JhengHei" panose="020B0604030504040204" pitchFamily="34" charset="-120"/>
+              </a:rPr>
+              <a:t>( </a:t>
+            </a:r>
+            <a:r>
+              <a:rPr lang="zh-CN" altLang="en-US" sz="2400" b="1" dirty="0">
+                <a:solidFill>
+                  <a:srgbClr val="000066"/>
+                </a:solidFill>
+                <a:latin typeface="Microsoft JhengHei" panose="020B0604030504040204" pitchFamily="34" charset="-120"/>
+                <a:ea typeface="Microsoft JhengHei" panose="020B0604030504040204" pitchFamily="34" charset="-120"/>
+              </a:rPr>
+              <a:t>副歌</a:t>
+            </a:r>
+            <a:r>
+              <a:rPr lang="en-US" sz="2400" b="1" dirty="0">
+                <a:solidFill>
+                  <a:srgbClr val="000066"/>
+                </a:solidFill>
+                <a:latin typeface="Microsoft JhengHei" panose="020B0604030504040204" pitchFamily="34" charset="-120"/>
+                <a:ea typeface="Microsoft JhengHei" panose="020B0604030504040204" pitchFamily="34" charset="-120"/>
+              </a:rPr>
+              <a:t> )</a:t>
+            </a:r>
+            <a:endParaRPr lang="vi-VN" sz="2400" b="1" dirty="0">
+              <a:solidFill>
+                <a:srgbClr val="000066"/>
+              </a:solidFill>
+              <a:ea typeface="Microsoft JhengHei" panose="020B0604030504040204" pitchFamily="34" charset="-120"/>
+            </a:endParaRPr>
           </a:p>
         </p:txBody>
       </p:sp>
     </p:spTree>
+    <p:extLst>
+      <p:ext uri="{BB962C8B-B14F-4D97-AF65-F5344CB8AC3E}">
+        <p14:creationId xmlns:p14="http://schemas.microsoft.com/office/powerpoint/2010/main" val="1985773527"/>
+      </p:ext>
+    </p:extLst>
+  </p:cSld>
+  <p:clrMapOvr>
+    <a:masterClrMapping/>
+  </p:clrMapOvr>
+</p:sld>
+</file>
+
+<file path=ppt/slides/slide5.xml><?xml version="1.0" encoding="utf-8"?>
+<p:sld xmlns:a="http://schemas.openxmlformats.org/drawingml/2006/main" xmlns:r="http://schemas.openxmlformats.org/officeDocument/2006/relationships" xmlns:p="http://schemas.openxmlformats.org/presentationml/2006/main">
+  <p:cSld>
+    <p:spTree>
+      <p:nvGrpSpPr>
+        <p:cNvPr id="1" name="">
+          <a:extLst>
+            <a:ext uri="{FF2B5EF4-FFF2-40B4-BE49-F238E27FC236}">
+              <a16:creationId xmlns:a16="http://schemas.microsoft.com/office/drawing/2014/main" id="{8426950D-2EA1-7DA7-0839-1F71A0294B2F}"/>
+            </a:ext>
+          </a:extLst>
+        </p:cNvPr>
+        <p:cNvGrpSpPr/>
+        <p:nvPr/>
+      </p:nvGrpSpPr>
+      <p:grpSpPr>
+        <a:xfrm>
+          <a:off x="0" y="0"/>
+          <a:ext cx="0" cy="0"/>
+          <a:chOff x="0" y="0"/>
+          <a:chExt cx="0" cy="0"/>
+        </a:xfrm>
+      </p:grpSpPr>
+      <p:sp>
+        <p:nvSpPr>
+          <p:cNvPr id="5" name="內容版面配置區 4">
+            <a:extLst>
+              <a:ext uri="{FF2B5EF4-FFF2-40B4-BE49-F238E27FC236}">
+                <a16:creationId xmlns:a16="http://schemas.microsoft.com/office/drawing/2014/main" id="{34DEEEB3-D75E-BCA3-057C-CDD8052E7403}"/>
+              </a:ext>
+            </a:extLst>
+          </p:cNvPr>
+          <p:cNvSpPr>
+            <a:spLocks noGrp="1"/>
+          </p:cNvSpPr>
+          <p:nvPr>
+            <p:ph idx="1"/>
+          </p:nvPr>
+        </p:nvSpPr>
+        <p:spPr>
+          <a:xfrm>
+            <a:off x="0" y="1563639"/>
+            <a:ext cx="9144000" cy="1803647"/>
+          </a:xfrm>
+        </p:spPr>
+        <p:txBody>
+          <a:bodyPr anchor="ctr">
+            <a:normAutofit/>
+          </a:bodyPr>
+          <a:lstStyle/>
+          <a:p>
+            <a:pPr algn="ctr">
+              <a:buNone/>
+            </a:pPr>
+            <a:r>
+              <a:rPr lang="zh-TW" altLang="en-US" sz="4800" b="1" dirty="0">
+                <a:solidFill>
+                  <a:srgbClr val="000066"/>
+                </a:solidFill>
+                <a:latin typeface="微軟正黑體" pitchFamily="34" charset="-120"/>
+                <a:ea typeface="微軟正黑體" pitchFamily="34" charset="-120"/>
+              </a:rPr>
+              <a:t>我的心 </a:t>
+            </a:r>
+            <a:r>
+              <a:rPr lang="en-US" altLang="zh-TW" sz="4800" b="1" dirty="0">
+                <a:solidFill>
+                  <a:srgbClr val="000066"/>
+                </a:solidFill>
+                <a:latin typeface="微軟正黑體" pitchFamily="34" charset="-120"/>
+                <a:ea typeface="微軟正黑體" pitchFamily="34" charset="-120"/>
+              </a:rPr>
+              <a:t> </a:t>
+            </a:r>
+            <a:r>
+              <a:rPr lang="zh-TW" altLang="en-US" sz="4800" b="1" dirty="0">
+                <a:solidFill>
+                  <a:srgbClr val="000066"/>
+                </a:solidFill>
+                <a:latin typeface="微軟正黑體" pitchFamily="34" charset="-120"/>
+                <a:ea typeface="微軟正黑體" pitchFamily="34" charset="-120"/>
+              </a:rPr>
+              <a:t>不必再憂愁</a:t>
+            </a:r>
+          </a:p>
+          <a:p>
+            <a:pPr algn="ctr">
+              <a:buNone/>
+            </a:pPr>
+            <a:r>
+              <a:rPr lang="zh-TW" altLang="en-US" sz="4800" b="1" dirty="0">
+                <a:solidFill>
+                  <a:srgbClr val="000066"/>
+                </a:solidFill>
+                <a:latin typeface="微軟正黑體" pitchFamily="34" charset="-120"/>
+                <a:ea typeface="微軟正黑體" pitchFamily="34" charset="-120"/>
+              </a:rPr>
+              <a:t>也不用膽怯 </a:t>
+            </a:r>
+          </a:p>
+        </p:txBody>
+      </p:sp>
+      <p:sp>
+        <p:nvSpPr>
+          <p:cNvPr id="3" name="TextBox 2">
+            <a:extLst>
+              <a:ext uri="{FF2B5EF4-FFF2-40B4-BE49-F238E27FC236}">
+                <a16:creationId xmlns:a16="http://schemas.microsoft.com/office/drawing/2014/main" id="{304A5106-8C4C-4EF3-6DE4-370603E1AC94}"/>
+              </a:ext>
+            </a:extLst>
+          </p:cNvPr>
+          <p:cNvSpPr txBox="1"/>
+          <p:nvPr/>
+        </p:nvSpPr>
+        <p:spPr>
+          <a:xfrm>
+            <a:off x="0" y="3867895"/>
+            <a:ext cx="9144000" cy="461665"/>
+          </a:xfrm>
+          <a:prstGeom prst="rect">
+            <a:avLst/>
+          </a:prstGeom>
+          <a:noFill/>
+        </p:spPr>
+        <p:txBody>
+          <a:bodyPr wrap="square" rtlCol="0">
+            <a:spAutoFit/>
+          </a:bodyPr>
+          <a:lstStyle/>
+          <a:p>
+            <a:pPr algn="ctr"/>
+            <a:r>
+              <a:rPr lang="en-US" sz="2400" b="1" dirty="0">
+                <a:solidFill>
+                  <a:srgbClr val="000066"/>
+                </a:solidFill>
+                <a:latin typeface="Microsoft JhengHei" panose="020B0604030504040204" pitchFamily="34" charset="-120"/>
+                <a:ea typeface="Microsoft JhengHei" panose="020B0604030504040204" pitchFamily="34" charset="-120"/>
+              </a:rPr>
+              <a:t>( </a:t>
+            </a:r>
+            <a:r>
+              <a:rPr lang="zh-CN" altLang="en-US" sz="2400" b="1" dirty="0">
+                <a:solidFill>
+                  <a:srgbClr val="000066"/>
+                </a:solidFill>
+                <a:latin typeface="Microsoft JhengHei" panose="020B0604030504040204" pitchFamily="34" charset="-120"/>
+                <a:ea typeface="Microsoft JhengHei" panose="020B0604030504040204" pitchFamily="34" charset="-120"/>
+              </a:rPr>
+              <a:t>副歌</a:t>
+            </a:r>
+            <a:r>
+              <a:rPr lang="en-US" sz="2400" b="1" dirty="0">
+                <a:solidFill>
+                  <a:srgbClr val="000066"/>
+                </a:solidFill>
+                <a:latin typeface="Microsoft JhengHei" panose="020B0604030504040204" pitchFamily="34" charset="-120"/>
+                <a:ea typeface="Microsoft JhengHei" panose="020B0604030504040204" pitchFamily="34" charset="-120"/>
+              </a:rPr>
+              <a:t> )</a:t>
+            </a:r>
+            <a:endParaRPr lang="vi-VN" sz="2400" b="1" dirty="0">
+              <a:solidFill>
+                <a:srgbClr val="000066"/>
+              </a:solidFill>
+              <a:ea typeface="Microsoft JhengHei" panose="020B0604030504040204" pitchFamily="34" charset="-120"/>
+            </a:endParaRPr>
+          </a:p>
+        </p:txBody>
+      </p:sp>
+    </p:spTree>
+    <p:extLst>
+      <p:ext uri="{BB962C8B-B14F-4D97-AF65-F5344CB8AC3E}">
+        <p14:creationId xmlns:p14="http://schemas.microsoft.com/office/powerpoint/2010/main" val="3876407839"/>
+      </p:ext>
+    </p:extLst>
+  </p:cSld>
+  <p:clrMapOvr>
+    <a:masterClrMapping/>
+  </p:clrMapOvr>
+</p:sld>
+</file>
+
+<file path=ppt/slides/slide6.xml><?xml version="1.0" encoding="utf-8"?>
+<p:sld xmlns:a="http://schemas.openxmlformats.org/drawingml/2006/main" xmlns:r="http://schemas.openxmlformats.org/officeDocument/2006/relationships" xmlns:p="http://schemas.openxmlformats.org/presentationml/2006/main">
+  <p:cSld>
+    <p:spTree>
+      <p:nvGrpSpPr>
+        <p:cNvPr id="1" name="">
+          <a:extLst>
+            <a:ext uri="{FF2B5EF4-FFF2-40B4-BE49-F238E27FC236}">
+              <a16:creationId xmlns:a16="http://schemas.microsoft.com/office/drawing/2014/main" id="{4348FCF6-A2CD-79AC-3758-93462B609E67}"/>
+            </a:ext>
+          </a:extLst>
+        </p:cNvPr>
+        <p:cNvGrpSpPr/>
+        <p:nvPr/>
+      </p:nvGrpSpPr>
+      <p:grpSpPr>
+        <a:xfrm>
+          <a:off x="0" y="0"/>
+          <a:ext cx="0" cy="0"/>
+          <a:chOff x="0" y="0"/>
+          <a:chExt cx="0" cy="0"/>
+        </a:xfrm>
+      </p:grpSpPr>
+      <p:sp>
+        <p:nvSpPr>
+          <p:cNvPr id="5" name="內容版面配置區 4">
+            <a:extLst>
+              <a:ext uri="{FF2B5EF4-FFF2-40B4-BE49-F238E27FC236}">
+                <a16:creationId xmlns:a16="http://schemas.microsoft.com/office/drawing/2014/main" id="{BE68527B-D70C-ED0B-FD27-96DC6F69E9A7}"/>
+              </a:ext>
+            </a:extLst>
+          </p:cNvPr>
+          <p:cNvSpPr>
+            <a:spLocks noGrp="1"/>
+          </p:cNvSpPr>
+          <p:nvPr>
+            <p:ph idx="1"/>
+          </p:nvPr>
+        </p:nvSpPr>
+        <p:spPr>
+          <a:xfrm>
+            <a:off x="0" y="1563639"/>
+            <a:ext cx="9144000" cy="1803647"/>
+          </a:xfrm>
+        </p:spPr>
+        <p:txBody>
+          <a:bodyPr anchor="ctr">
+            <a:normAutofit/>
+          </a:bodyPr>
+          <a:lstStyle/>
+          <a:p>
+            <a:pPr algn="ctr">
+              <a:buNone/>
+            </a:pPr>
+            <a:r>
+              <a:rPr lang="zh-TW" altLang="en-US" sz="4800" b="1" dirty="0">
+                <a:solidFill>
+                  <a:srgbClr val="000066"/>
+                </a:solidFill>
+                <a:latin typeface="微軟正黑體" pitchFamily="34" charset="-120"/>
+                <a:ea typeface="微軟正黑體" pitchFamily="34" charset="-120"/>
+              </a:rPr>
+              <a:t>主  祢賜下這平安</a:t>
+            </a:r>
+          </a:p>
+          <a:p>
+            <a:pPr algn="ctr">
+              <a:buNone/>
+            </a:pPr>
+            <a:r>
+              <a:rPr lang="zh-TW" altLang="en-US" sz="4800" b="1" dirty="0">
+                <a:solidFill>
+                  <a:srgbClr val="000066"/>
+                </a:solidFill>
+                <a:latin typeface="微軟正黑體" pitchFamily="34" charset="-120"/>
+                <a:ea typeface="微軟正黑體" pitchFamily="34" charset="-120"/>
+              </a:rPr>
+              <a:t>是用重價換來的恩典</a:t>
+            </a:r>
+          </a:p>
+        </p:txBody>
+      </p:sp>
+      <p:sp>
+        <p:nvSpPr>
+          <p:cNvPr id="3" name="TextBox 2">
+            <a:extLst>
+              <a:ext uri="{FF2B5EF4-FFF2-40B4-BE49-F238E27FC236}">
+                <a16:creationId xmlns:a16="http://schemas.microsoft.com/office/drawing/2014/main" id="{0CFB5608-E724-E16C-4538-C516A01F4653}"/>
+              </a:ext>
+            </a:extLst>
+          </p:cNvPr>
+          <p:cNvSpPr txBox="1"/>
+          <p:nvPr/>
+        </p:nvSpPr>
+        <p:spPr>
+          <a:xfrm>
+            <a:off x="0" y="3867895"/>
+            <a:ext cx="9144000" cy="461665"/>
+          </a:xfrm>
+          <a:prstGeom prst="rect">
+            <a:avLst/>
+          </a:prstGeom>
+          <a:noFill/>
+        </p:spPr>
+        <p:txBody>
+          <a:bodyPr wrap="square" rtlCol="0">
+            <a:spAutoFit/>
+          </a:bodyPr>
+          <a:lstStyle/>
+          <a:p>
+            <a:pPr algn="ctr"/>
+            <a:r>
+              <a:rPr lang="en-US" sz="2400" b="1" dirty="0">
+                <a:solidFill>
+                  <a:srgbClr val="000066"/>
+                </a:solidFill>
+                <a:latin typeface="Microsoft JhengHei" panose="020B0604030504040204" pitchFamily="34" charset="-120"/>
+                <a:ea typeface="Microsoft JhengHei" panose="020B0604030504040204" pitchFamily="34" charset="-120"/>
+              </a:rPr>
+              <a:t>( </a:t>
+            </a:r>
+            <a:r>
+              <a:rPr lang="zh-CN" altLang="en-US" sz="2400" b="1" dirty="0">
+                <a:solidFill>
+                  <a:srgbClr val="000066"/>
+                </a:solidFill>
+                <a:latin typeface="Microsoft JhengHei" panose="020B0604030504040204" pitchFamily="34" charset="-120"/>
+                <a:ea typeface="Microsoft JhengHei" panose="020B0604030504040204" pitchFamily="34" charset="-120"/>
+              </a:rPr>
+              <a:t>副歌</a:t>
+            </a:r>
+            <a:r>
+              <a:rPr lang="en-US" sz="2400" b="1" dirty="0">
+                <a:solidFill>
+                  <a:srgbClr val="000066"/>
+                </a:solidFill>
+                <a:latin typeface="Microsoft JhengHei" panose="020B0604030504040204" pitchFamily="34" charset="-120"/>
+                <a:ea typeface="Microsoft JhengHei" panose="020B0604030504040204" pitchFamily="34" charset="-120"/>
+              </a:rPr>
+              <a:t> )</a:t>
+            </a:r>
+            <a:endParaRPr lang="vi-VN" sz="2400" b="1" dirty="0">
+              <a:solidFill>
+                <a:srgbClr val="000066"/>
+              </a:solidFill>
+              <a:ea typeface="Microsoft JhengHei" panose="020B0604030504040204" pitchFamily="34" charset="-120"/>
+            </a:endParaRPr>
+          </a:p>
+        </p:txBody>
+      </p:sp>
+    </p:spTree>
+    <p:extLst>
+      <p:ext uri="{BB962C8B-B14F-4D97-AF65-F5344CB8AC3E}">
+        <p14:creationId xmlns:p14="http://schemas.microsoft.com/office/powerpoint/2010/main" val="1162568622"/>
+      </p:ext>
+    </p:extLst>
+  </p:cSld>
+  <p:clrMapOvr>
+    <a:masterClrMapping/>
+  </p:clrMapOvr>
+</p:sld>
+</file>
+
+<file path=ppt/slides/slide7.xml><?xml version="1.0" encoding="utf-8"?>
+<p:sld xmlns:a="http://schemas.openxmlformats.org/drawingml/2006/main" xmlns:r="http://schemas.openxmlformats.org/officeDocument/2006/relationships" xmlns:p="http://schemas.openxmlformats.org/presentationml/2006/main">
+  <p:cSld>
+    <p:spTree>
+      <p:nvGrpSpPr>
+        <p:cNvPr id="1" name="">
+          <a:extLst>
+            <a:ext uri="{FF2B5EF4-FFF2-40B4-BE49-F238E27FC236}">
+              <a16:creationId xmlns:a16="http://schemas.microsoft.com/office/drawing/2014/main" id="{D455BE5D-BB2D-B0B8-8890-35FAE61CA211}"/>
+            </a:ext>
+          </a:extLst>
+        </p:cNvPr>
+        <p:cNvGrpSpPr/>
+        <p:nvPr/>
+      </p:nvGrpSpPr>
+      <p:grpSpPr>
+        <a:xfrm>
+          <a:off x="0" y="0"/>
+          <a:ext cx="0" cy="0"/>
+          <a:chOff x="0" y="0"/>
+          <a:chExt cx="0" cy="0"/>
+        </a:xfrm>
+      </p:grpSpPr>
+      <p:sp>
+        <p:nvSpPr>
+          <p:cNvPr id="5" name="內容版面配置區 4">
+            <a:extLst>
+              <a:ext uri="{FF2B5EF4-FFF2-40B4-BE49-F238E27FC236}">
+                <a16:creationId xmlns:a16="http://schemas.microsoft.com/office/drawing/2014/main" id="{CD0AFE8B-0F13-0DBA-EDF3-A2C70178775C}"/>
+              </a:ext>
+            </a:extLst>
+          </p:cNvPr>
+          <p:cNvSpPr>
+            <a:spLocks noGrp="1"/>
+          </p:cNvSpPr>
+          <p:nvPr>
+            <p:ph idx="1"/>
+          </p:nvPr>
+        </p:nvSpPr>
+        <p:spPr>
+          <a:xfrm>
+            <a:off x="0" y="1563639"/>
+            <a:ext cx="9144000" cy="1803647"/>
+          </a:xfrm>
+        </p:spPr>
+        <p:txBody>
+          <a:bodyPr anchor="ctr">
+            <a:normAutofit/>
+          </a:bodyPr>
+          <a:lstStyle/>
+          <a:p>
+            <a:pPr algn="ctr">
+              <a:buNone/>
+            </a:pPr>
+            <a:r>
+              <a:rPr lang="zh-TW" altLang="en-US" sz="4800" b="1" dirty="0">
+                <a:solidFill>
+                  <a:srgbClr val="000066"/>
+                </a:solidFill>
+                <a:latin typeface="微軟正黑體" pitchFamily="34" charset="-120"/>
+                <a:ea typeface="微軟正黑體" pitchFamily="34" charset="-120"/>
+              </a:rPr>
+              <a:t>受鞭傷使我得醫治</a:t>
+            </a:r>
+          </a:p>
+          <a:p>
+            <a:pPr algn="ctr">
+              <a:buNone/>
+            </a:pPr>
+            <a:r>
+              <a:rPr lang="zh-TW" altLang="en-US" sz="4800" b="1" dirty="0">
+                <a:solidFill>
+                  <a:srgbClr val="000066"/>
+                </a:solidFill>
+                <a:latin typeface="微軟正黑體" pitchFamily="34" charset="-120"/>
+                <a:ea typeface="微軟正黑體" pitchFamily="34" charset="-120"/>
+              </a:rPr>
+              <a:t>受刑罰讓我得到赦免</a:t>
+            </a:r>
+          </a:p>
+        </p:txBody>
+      </p:sp>
+      <p:sp>
+        <p:nvSpPr>
+          <p:cNvPr id="3" name="TextBox 2">
+            <a:extLst>
+              <a:ext uri="{FF2B5EF4-FFF2-40B4-BE49-F238E27FC236}">
+                <a16:creationId xmlns:a16="http://schemas.microsoft.com/office/drawing/2014/main" id="{A84B9D16-8AFC-0488-BCE8-46AB2C95F4F2}"/>
+              </a:ext>
+            </a:extLst>
+          </p:cNvPr>
+          <p:cNvSpPr txBox="1"/>
+          <p:nvPr/>
+        </p:nvSpPr>
+        <p:spPr>
+          <a:xfrm>
+            <a:off x="0" y="3867895"/>
+            <a:ext cx="9144000" cy="461665"/>
+          </a:xfrm>
+          <a:prstGeom prst="rect">
+            <a:avLst/>
+          </a:prstGeom>
+          <a:noFill/>
+        </p:spPr>
+        <p:txBody>
+          <a:bodyPr wrap="square" rtlCol="0">
+            <a:spAutoFit/>
+          </a:bodyPr>
+          <a:lstStyle/>
+          <a:p>
+            <a:pPr algn="ctr"/>
+            <a:r>
+              <a:rPr lang="en-US" sz="2400" b="1" dirty="0">
+                <a:solidFill>
+                  <a:srgbClr val="000066"/>
+                </a:solidFill>
+                <a:latin typeface="Microsoft JhengHei" panose="020B0604030504040204" pitchFamily="34" charset="-120"/>
+                <a:ea typeface="Microsoft JhengHei" panose="020B0604030504040204" pitchFamily="34" charset="-120"/>
+              </a:rPr>
+              <a:t>( </a:t>
+            </a:r>
+            <a:r>
+              <a:rPr lang="zh-CN" altLang="en-US" sz="2400" b="1" dirty="0">
+                <a:solidFill>
+                  <a:srgbClr val="000066"/>
+                </a:solidFill>
+                <a:latin typeface="Microsoft JhengHei" panose="020B0604030504040204" pitchFamily="34" charset="-120"/>
+                <a:ea typeface="Microsoft JhengHei" panose="020B0604030504040204" pitchFamily="34" charset="-120"/>
+              </a:rPr>
+              <a:t>副歌</a:t>
+            </a:r>
+            <a:r>
+              <a:rPr lang="en-US" sz="2400" b="1" dirty="0">
+                <a:solidFill>
+                  <a:srgbClr val="000066"/>
+                </a:solidFill>
+                <a:latin typeface="Microsoft JhengHei" panose="020B0604030504040204" pitchFamily="34" charset="-120"/>
+                <a:ea typeface="Microsoft JhengHei" panose="020B0604030504040204" pitchFamily="34" charset="-120"/>
+              </a:rPr>
+              <a:t> )</a:t>
+            </a:r>
+            <a:endParaRPr lang="vi-VN" sz="2400" b="1" dirty="0">
+              <a:solidFill>
+                <a:srgbClr val="000066"/>
+              </a:solidFill>
+              <a:ea typeface="Microsoft JhengHei" panose="020B0604030504040204" pitchFamily="34" charset="-120"/>
+            </a:endParaRPr>
+          </a:p>
+        </p:txBody>
+      </p:sp>
+    </p:spTree>
+    <p:extLst>
+      <p:ext uri="{BB962C8B-B14F-4D97-AF65-F5344CB8AC3E}">
+        <p14:creationId xmlns:p14="http://schemas.microsoft.com/office/powerpoint/2010/main" val="1639668500"/>
+      </p:ext>
+    </p:extLst>
+  </p:cSld>
+  <p:clrMapOvr>
+    <a:masterClrMapping/>
+  </p:clrMapOvr>
+</p:sld>
+</file>
+
+<file path=ppt/slides/slide8.xml><?xml version="1.0" encoding="utf-8"?>
+<p:sld xmlns:a="http://schemas.openxmlformats.org/drawingml/2006/main" xmlns:r="http://schemas.openxmlformats.org/officeDocument/2006/relationships" xmlns:p="http://schemas.openxmlformats.org/presentationml/2006/main">
+  <p:cSld>
+    <p:spTree>
+      <p:nvGrpSpPr>
+        <p:cNvPr id="1" name="">
+          <a:extLst>
+            <a:ext uri="{FF2B5EF4-FFF2-40B4-BE49-F238E27FC236}">
+              <a16:creationId xmlns:a16="http://schemas.microsoft.com/office/drawing/2014/main" id="{B77E42BF-96F9-0A69-09D7-70590254BA89}"/>
+            </a:ext>
+          </a:extLst>
+        </p:cNvPr>
+        <p:cNvGrpSpPr/>
+        <p:nvPr/>
+      </p:nvGrpSpPr>
+      <p:grpSpPr>
+        <a:xfrm>
+          <a:off x="0" y="0"/>
+          <a:ext cx="0" cy="0"/>
+          <a:chOff x="0" y="0"/>
+          <a:chExt cx="0" cy="0"/>
+        </a:xfrm>
+      </p:grpSpPr>
+      <p:sp>
+        <p:nvSpPr>
+          <p:cNvPr id="5" name="內容版面配置區 4">
+            <a:extLst>
+              <a:ext uri="{FF2B5EF4-FFF2-40B4-BE49-F238E27FC236}">
+                <a16:creationId xmlns:a16="http://schemas.microsoft.com/office/drawing/2014/main" id="{E2233403-018B-0061-6CA8-D838934B2285}"/>
+              </a:ext>
+            </a:extLst>
+          </p:cNvPr>
+          <p:cNvSpPr>
+            <a:spLocks noGrp="1"/>
+          </p:cNvSpPr>
+          <p:nvPr>
+            <p:ph idx="1"/>
+          </p:nvPr>
+        </p:nvSpPr>
+        <p:spPr>
+          <a:xfrm>
+            <a:off x="0" y="1563639"/>
+            <a:ext cx="9144000" cy="1803647"/>
+          </a:xfrm>
+        </p:spPr>
+        <p:txBody>
+          <a:bodyPr anchor="ctr">
+            <a:normAutofit/>
+          </a:bodyPr>
+          <a:lstStyle/>
+          <a:p>
+            <a:pPr algn="ctr">
+              <a:buNone/>
+            </a:pPr>
+            <a:r>
+              <a:rPr lang="zh-TW" altLang="en-US" sz="4800" b="1" dirty="0">
+                <a:solidFill>
+                  <a:srgbClr val="000066"/>
+                </a:solidFill>
+                <a:latin typeface="微軟正黑體" pitchFamily="34" charset="-120"/>
+                <a:ea typeface="微軟正黑體" pitchFamily="34" charset="-120"/>
+              </a:rPr>
+              <a:t>就算捆鎖劫難縈繞著我 </a:t>
+            </a:r>
+          </a:p>
+          <a:p>
+            <a:pPr algn="ctr">
+              <a:buNone/>
+            </a:pPr>
+            <a:r>
+              <a:rPr lang="zh-TW" altLang="en-US" sz="4800" b="1" dirty="0">
+                <a:solidFill>
+                  <a:srgbClr val="000066"/>
+                </a:solidFill>
+                <a:latin typeface="微軟正黑體" pitchFamily="34" charset="-120"/>
+                <a:ea typeface="微軟正黑體" pitchFamily="34" charset="-120"/>
+              </a:rPr>
+              <a:t>我心藏著不死盼望</a:t>
+            </a:r>
+          </a:p>
+        </p:txBody>
+      </p:sp>
+      <p:sp>
+        <p:nvSpPr>
+          <p:cNvPr id="3" name="TextBox 2">
+            <a:extLst>
+              <a:ext uri="{FF2B5EF4-FFF2-40B4-BE49-F238E27FC236}">
+                <a16:creationId xmlns:a16="http://schemas.microsoft.com/office/drawing/2014/main" id="{BD4DB664-5850-B649-A724-2D0343D0D834}"/>
+              </a:ext>
+            </a:extLst>
+          </p:cNvPr>
+          <p:cNvSpPr txBox="1"/>
+          <p:nvPr/>
+        </p:nvSpPr>
+        <p:spPr>
+          <a:xfrm>
+            <a:off x="0" y="3867895"/>
+            <a:ext cx="9144000" cy="461665"/>
+          </a:xfrm>
+          <a:prstGeom prst="rect">
+            <a:avLst/>
+          </a:prstGeom>
+          <a:noFill/>
+        </p:spPr>
+        <p:txBody>
+          <a:bodyPr wrap="square" rtlCol="0">
+            <a:spAutoFit/>
+          </a:bodyPr>
+          <a:lstStyle/>
+          <a:p>
+            <a:pPr algn="ctr"/>
+            <a:r>
+              <a:rPr lang="en-US" sz="2400" b="1" dirty="0">
+                <a:solidFill>
+                  <a:srgbClr val="000066"/>
+                </a:solidFill>
+                <a:latin typeface="Microsoft JhengHei" panose="020B0604030504040204" pitchFamily="34" charset="-120"/>
+                <a:ea typeface="Microsoft JhengHei" panose="020B0604030504040204" pitchFamily="34" charset="-120"/>
+              </a:rPr>
+              <a:t>( </a:t>
+            </a:r>
+            <a:r>
+              <a:rPr lang="zh-CN" altLang="en-US" sz="2400" b="1" dirty="0">
+                <a:solidFill>
+                  <a:srgbClr val="000066"/>
+                </a:solidFill>
+                <a:latin typeface="Microsoft JhengHei" panose="020B0604030504040204" pitchFamily="34" charset="-120"/>
+                <a:ea typeface="Microsoft JhengHei" panose="020B0604030504040204" pitchFamily="34" charset="-120"/>
+              </a:rPr>
+              <a:t>正歌 </a:t>
+            </a:r>
+            <a:r>
+              <a:rPr lang="en-US" altLang="zh-CN" sz="2400" b="1" dirty="0">
+                <a:solidFill>
+                  <a:srgbClr val="000066"/>
+                </a:solidFill>
+                <a:latin typeface="Microsoft JhengHei" panose="020B0604030504040204" pitchFamily="34" charset="-120"/>
+                <a:ea typeface="Microsoft JhengHei" panose="020B0604030504040204" pitchFamily="34" charset="-120"/>
+              </a:rPr>
+              <a:t>2</a:t>
+            </a:r>
+            <a:r>
+              <a:rPr lang="en-US" sz="2400" b="1" dirty="0">
+                <a:solidFill>
+                  <a:srgbClr val="000066"/>
+                </a:solidFill>
+                <a:latin typeface="Microsoft JhengHei" panose="020B0604030504040204" pitchFamily="34" charset="-120"/>
+                <a:ea typeface="Microsoft JhengHei" panose="020B0604030504040204" pitchFamily="34" charset="-120"/>
+              </a:rPr>
+              <a:t> )</a:t>
+            </a:r>
+            <a:endParaRPr lang="vi-VN" sz="2400" b="1" dirty="0">
+              <a:solidFill>
+                <a:srgbClr val="000066"/>
+              </a:solidFill>
+              <a:ea typeface="Microsoft JhengHei" panose="020B0604030504040204" pitchFamily="34" charset="-120"/>
+            </a:endParaRPr>
+          </a:p>
+        </p:txBody>
+      </p:sp>
+    </p:spTree>
+    <p:extLst>
+      <p:ext uri="{BB962C8B-B14F-4D97-AF65-F5344CB8AC3E}">
+        <p14:creationId xmlns:p14="http://schemas.microsoft.com/office/powerpoint/2010/main" val="272556553"/>
+      </p:ext>
+    </p:extLst>
+  </p:cSld>
+  <p:clrMapOvr>
+    <a:masterClrMapping/>
+  </p:clrMapOvr>
+</p:sld>
+</file>
+
+<file path=ppt/slides/slide9.xml><?xml version="1.0" encoding="utf-8"?>
+<p:sld xmlns:a="http://schemas.openxmlformats.org/drawingml/2006/main" xmlns:r="http://schemas.openxmlformats.org/officeDocument/2006/relationships" xmlns:p="http://schemas.openxmlformats.org/presentationml/2006/main">
+  <p:cSld>
+    <p:spTree>
+      <p:nvGrpSpPr>
+        <p:cNvPr id="1" name="">
+          <a:extLst>
+            <a:ext uri="{FF2B5EF4-FFF2-40B4-BE49-F238E27FC236}">
+              <a16:creationId xmlns:a16="http://schemas.microsoft.com/office/drawing/2014/main" id="{3773A768-8311-E2A8-BCB6-A97614BDE30C}"/>
+            </a:ext>
+          </a:extLst>
+        </p:cNvPr>
+        <p:cNvGrpSpPr/>
+        <p:nvPr/>
+      </p:nvGrpSpPr>
+      <p:grpSpPr>
+        <a:xfrm>
+          <a:off x="0" y="0"/>
+          <a:ext cx="0" cy="0"/>
+          <a:chOff x="0" y="0"/>
+          <a:chExt cx="0" cy="0"/>
+        </a:xfrm>
+      </p:grpSpPr>
+      <p:sp>
+        <p:nvSpPr>
+          <p:cNvPr id="5" name="內容版面配置區 4">
+            <a:extLst>
+              <a:ext uri="{FF2B5EF4-FFF2-40B4-BE49-F238E27FC236}">
+                <a16:creationId xmlns:a16="http://schemas.microsoft.com/office/drawing/2014/main" id="{CBDA0794-F9F7-9A34-BA91-05D0BB76F650}"/>
+              </a:ext>
+            </a:extLst>
+          </p:cNvPr>
+          <p:cNvSpPr>
+            <a:spLocks noGrp="1"/>
+          </p:cNvSpPr>
+          <p:nvPr>
+            <p:ph idx="1"/>
+          </p:nvPr>
+        </p:nvSpPr>
+        <p:spPr>
+          <a:xfrm>
+            <a:off x="0" y="1563639"/>
+            <a:ext cx="9144000" cy="1803647"/>
+          </a:xfrm>
+        </p:spPr>
+        <p:txBody>
+          <a:bodyPr anchor="ctr">
+            <a:normAutofit/>
+          </a:bodyPr>
+          <a:lstStyle/>
+          <a:p>
+            <a:pPr algn="ctr">
+              <a:buNone/>
+            </a:pPr>
+            <a:r>
+              <a:rPr lang="zh-CN" altLang="en-US" sz="4800" b="1" dirty="0">
+                <a:solidFill>
+                  <a:srgbClr val="000066"/>
+                </a:solidFill>
+                <a:latin typeface="微軟正黑體" pitchFamily="34" charset="-120"/>
+                <a:ea typeface="微軟正黑體" pitchFamily="34" charset="-120"/>
+              </a:rPr>
+              <a:t>耶穌是我牧者  永在我旁</a:t>
+            </a:r>
+          </a:p>
+          <a:p>
+            <a:pPr algn="ctr">
+              <a:buNone/>
+            </a:pPr>
+            <a:r>
+              <a:rPr lang="zh-CN" altLang="en-US" sz="4800" b="1" dirty="0">
+                <a:solidFill>
+                  <a:srgbClr val="000066"/>
+                </a:solidFill>
+                <a:latin typeface="微軟正黑體" pitchFamily="34" charset="-120"/>
+                <a:ea typeface="微軟正黑體" pitchFamily="34" charset="-120"/>
+              </a:rPr>
+              <a:t>祢杖祢竿都安慰我</a:t>
+            </a:r>
+          </a:p>
+        </p:txBody>
+      </p:sp>
+      <p:sp>
+        <p:nvSpPr>
+          <p:cNvPr id="3" name="TextBox 2">
+            <a:extLst>
+              <a:ext uri="{FF2B5EF4-FFF2-40B4-BE49-F238E27FC236}">
+                <a16:creationId xmlns:a16="http://schemas.microsoft.com/office/drawing/2014/main" id="{A3C50DEC-B87C-8231-D4FA-FFE669832E14}"/>
+              </a:ext>
+            </a:extLst>
+          </p:cNvPr>
+          <p:cNvSpPr txBox="1"/>
+          <p:nvPr/>
+        </p:nvSpPr>
+        <p:spPr>
+          <a:xfrm>
+            <a:off x="0" y="3867895"/>
+            <a:ext cx="9144000" cy="461665"/>
+          </a:xfrm>
+          <a:prstGeom prst="rect">
+            <a:avLst/>
+          </a:prstGeom>
+          <a:noFill/>
+        </p:spPr>
+        <p:txBody>
+          <a:bodyPr wrap="square" rtlCol="0">
+            <a:spAutoFit/>
+          </a:bodyPr>
+          <a:lstStyle/>
+          <a:p>
+            <a:pPr algn="ctr"/>
+            <a:r>
+              <a:rPr lang="en-US" sz="2400" b="1" dirty="0">
+                <a:solidFill>
+                  <a:srgbClr val="000066"/>
+                </a:solidFill>
+                <a:latin typeface="Microsoft JhengHei" panose="020B0604030504040204" pitchFamily="34" charset="-120"/>
+                <a:ea typeface="Microsoft JhengHei" panose="020B0604030504040204" pitchFamily="34" charset="-120"/>
+              </a:rPr>
+              <a:t>( </a:t>
+            </a:r>
+            <a:r>
+              <a:rPr lang="zh-CN" altLang="en-US" sz="2400" b="1" dirty="0">
+                <a:solidFill>
+                  <a:srgbClr val="000066"/>
+                </a:solidFill>
+                <a:latin typeface="Microsoft JhengHei" panose="020B0604030504040204" pitchFamily="34" charset="-120"/>
+                <a:ea typeface="Microsoft JhengHei" panose="020B0604030504040204" pitchFamily="34" charset="-120"/>
+              </a:rPr>
+              <a:t>正歌 </a:t>
+            </a:r>
+            <a:r>
+              <a:rPr lang="en-US" altLang="zh-CN" sz="2400" b="1" dirty="0">
+                <a:solidFill>
+                  <a:srgbClr val="000066"/>
+                </a:solidFill>
+                <a:latin typeface="Microsoft JhengHei" panose="020B0604030504040204" pitchFamily="34" charset="-120"/>
+                <a:ea typeface="Microsoft JhengHei" panose="020B0604030504040204" pitchFamily="34" charset="-120"/>
+              </a:rPr>
+              <a:t>2</a:t>
+            </a:r>
+            <a:r>
+              <a:rPr lang="en-US" sz="2400" b="1" dirty="0">
+                <a:solidFill>
+                  <a:srgbClr val="000066"/>
+                </a:solidFill>
+                <a:latin typeface="Microsoft JhengHei" panose="020B0604030504040204" pitchFamily="34" charset="-120"/>
+                <a:ea typeface="Microsoft JhengHei" panose="020B0604030504040204" pitchFamily="34" charset="-120"/>
+              </a:rPr>
+              <a:t> )</a:t>
+            </a:r>
+            <a:endParaRPr lang="vi-VN" sz="2400" b="1" dirty="0">
+              <a:solidFill>
+                <a:srgbClr val="000066"/>
+              </a:solidFill>
+              <a:ea typeface="Microsoft JhengHei" panose="020B0604030504040204" pitchFamily="34" charset="-120"/>
+            </a:endParaRPr>
+          </a:p>
+        </p:txBody>
+      </p:sp>
+    </p:spTree>
+    <p:extLst>
+      <p:ext uri="{BB962C8B-B14F-4D97-AF65-F5344CB8AC3E}">
+        <p14:creationId xmlns:p14="http://schemas.microsoft.com/office/powerpoint/2010/main" val="3470823275"/>
+      </p:ext>
+    </p:extLst>
   </p:cSld>
   <p:clrMapOvr>
     <a:masterClrMapping/>
